--- a/output/wordlabs-wake-3day.pptx
+++ b/output/wordlabs-wake-3day.pptx
@@ -4279,7 +4279,7 @@
                 <a:ea typeface="Calibri" pitchFamily="34" charset="-122"/>
                 <a:cs typeface="Calibri" pitchFamily="34" charset="-120"/>
               </a:rPr>
-              <a:t>Origin: Old English: wacan</a:t>
+              <a:t>Origin: Latin: vigilare</a:t>
             </a:r>
             <a:endParaRPr lang="en-US" sz="1300" dirty="0"/>
           </a:p>
@@ -6040,7 +6040,7 @@
                 <a:ea typeface="Calibri" pitchFamily="34" charset="-122"/>
                 <a:cs typeface="Calibri" pitchFamily="34" charset="-120"/>
               </a:rPr>
-              <a:t>The sudden noise was enough to </a:t>
+              <a:t>It was hard to </a:t>
             </a:r>
             <a:pPr algn="l" indent="0" marL="0">
               <a:buNone/>
@@ -6071,7 +6071,7 @@
                 <a:ea typeface="Calibri" pitchFamily="34" charset="-122"/>
                 <a:cs typeface="Calibri" pitchFamily="34" charset="-120"/>
               </a:rPr>
-              <a:t> him, and he lay there in a </a:t>
+              <a:t> little Sam, but once he was </a:t>
             </a:r>
             <a:pPr algn="l" indent="0" marL="0">
               <a:buNone/>
@@ -6102,7 +6102,7 @@
                 <a:ea typeface="Calibri" pitchFamily="34" charset="-122"/>
                 <a:cs typeface="Calibri" pitchFamily="34" charset="-120"/>
               </a:rPr>
-              <a:t> daze.</a:t>
+              <a:t>, he couldn't stop talking.</a:t>
             </a:r>
             <a:endParaRPr lang="en-US" sz="1800" dirty="0"/>
           </a:p>
@@ -8045,7 +8045,7 @@
                 <a:ea typeface="Trebuchet MS" pitchFamily="34" charset="-122"/>
                 <a:cs typeface="Trebuchet MS" pitchFamily="34" charset="-120"/>
               </a:rPr>
-              <a:t>n</a:t>
+              <a:t>en</a:t>
             </a:r>
             <a:endParaRPr lang="en-US" sz="1300" dirty="0"/>
           </a:p>
@@ -8084,7 +8084,7 @@
                 <a:ea typeface="Calibri" pitchFamily="34" charset="-122"/>
                 <a:cs typeface="Calibri" pitchFamily="34" charset="-120"/>
               </a:rPr>
-              <a:t>verb-forming suffix</a:t>
+              <a:t>to cause or become</a:t>
             </a:r>
             <a:endParaRPr lang="en-US" sz="850" dirty="0"/>
           </a:p>
@@ -9142,7 +9142,7 @@
                 <a:ea typeface="Trebuchet MS" pitchFamily="34" charset="-122"/>
                 <a:cs typeface="Trebuchet MS" pitchFamily="34" charset="-120"/>
               </a:rPr>
-              <a:t>n</a:t>
+              <a:t>en</a:t>
             </a:r>
             <a:endParaRPr lang="en-US" sz="1300" dirty="0"/>
           </a:p>
@@ -9181,7 +9181,7 @@
                 <a:ea typeface="Calibri" pitchFamily="34" charset="-122"/>
                 <a:cs typeface="Calibri" pitchFamily="34" charset="-120"/>
               </a:rPr>
-              <a:t>verb-forming suffix</a:t>
+              <a:t>to cause or become</a:t>
             </a:r>
             <a:endParaRPr lang="en-US" sz="850" dirty="0"/>
           </a:p>
@@ -10476,7 +10476,7 @@
                 <a:ea typeface="Trebuchet MS" pitchFamily="34" charset="-122"/>
                 <a:cs typeface="Trebuchet MS" pitchFamily="34" charset="-120"/>
               </a:rPr>
-              <a:t>n</a:t>
+              <a:t>en</a:t>
             </a:r>
             <a:endParaRPr lang="en-US" sz="1300" dirty="0"/>
           </a:p>
@@ -10515,7 +10515,7 @@
                 <a:ea typeface="Calibri" pitchFamily="34" charset="-122"/>
                 <a:cs typeface="Calibri" pitchFamily="34" charset="-120"/>
               </a:rPr>
-              <a:t>verb-forming suffix</a:t>
+              <a:t>to cause or become</a:t>
             </a:r>
             <a:endParaRPr lang="en-US" sz="850" dirty="0"/>
           </a:p>
@@ -10991,7 +10991,7 @@
         </p:nvSpPr>
         <p:spPr>
           <a:xfrm>
-            <a:off x="2254649" y="4169664"/>
+            <a:off x="2427732" y="4169664"/>
             <a:ext cx="685800" cy="475488"/>
           </a:xfrm>
           <a:prstGeom prst="rect">
@@ -11018,7 +11018,7 @@
         </p:nvSpPr>
         <p:spPr>
           <a:xfrm>
-            <a:off x="2254649" y="4169664"/>
+            <a:off x="2427732" y="4169664"/>
             <a:ext cx="685800" cy="475488"/>
           </a:xfrm>
           <a:prstGeom prst="rect">
@@ -11057,7 +11057,7 @@
         </p:nvSpPr>
         <p:spPr>
           <a:xfrm>
-            <a:off x="3293146" y="4169664"/>
+            <a:off x="3639312" y="4169664"/>
             <a:ext cx="685800" cy="475488"/>
           </a:xfrm>
           <a:prstGeom prst="rect">
@@ -11084,7 +11084,7 @@
         </p:nvSpPr>
         <p:spPr>
           <a:xfrm>
-            <a:off x="3293146" y="4169664"/>
+            <a:off x="3639312" y="4169664"/>
             <a:ext cx="685800" cy="475488"/>
           </a:xfrm>
           <a:prstGeom prst="rect">
@@ -11123,7 +11123,7 @@
         </p:nvSpPr>
         <p:spPr>
           <a:xfrm>
-            <a:off x="4331643" y="4169664"/>
+            <a:off x="4850892" y="4169664"/>
             <a:ext cx="685800" cy="475488"/>
           </a:xfrm>
           <a:prstGeom prst="rect">
@@ -11150,7 +11150,7 @@
         </p:nvSpPr>
         <p:spPr>
           <a:xfrm>
-            <a:off x="4331643" y="4169664"/>
+            <a:off x="4850892" y="4169664"/>
             <a:ext cx="685800" cy="475488"/>
           </a:xfrm>
           <a:prstGeom prst="rect">
@@ -11189,7 +11189,7 @@
         </p:nvSpPr>
         <p:spPr>
           <a:xfrm>
-            <a:off x="5370141" y="4169664"/>
+            <a:off x="6062472" y="4169664"/>
             <a:ext cx="685800" cy="475488"/>
           </a:xfrm>
           <a:prstGeom prst="rect">
@@ -11216,7 +11216,7 @@
         </p:nvSpPr>
         <p:spPr>
           <a:xfrm>
-            <a:off x="5370141" y="4169664"/>
+            <a:off x="6062472" y="4169664"/>
             <a:ext cx="685800" cy="475488"/>
           </a:xfrm>
           <a:prstGeom prst="rect">
@@ -11255,7 +11255,7 @@
         </p:nvSpPr>
         <p:spPr>
           <a:xfrm>
-            <a:off x="6408638" y="4169664"/>
+            <a:off x="7274052" y="4169664"/>
             <a:ext cx="685800" cy="475488"/>
           </a:xfrm>
           <a:prstGeom prst="rect">
@@ -11282,7 +11282,7 @@
         </p:nvSpPr>
         <p:spPr>
           <a:xfrm>
-            <a:off x="6408638" y="4169664"/>
+            <a:off x="7274052" y="4169664"/>
             <a:ext cx="685800" cy="475488"/>
           </a:xfrm>
           <a:prstGeom prst="rect">
@@ -11307,73 +11307,7 @@
                 <a:ea typeface="Trebuchet MS" pitchFamily="34" charset="-122"/>
                 <a:cs typeface="Trebuchet MS" pitchFamily="34" charset="-120"/>
               </a:rPr>
-              <a:t>e</a:t>
-            </a:r>
-            <a:endParaRPr lang="en-US" sz="900" dirty="0"/>
-          </a:p>
-        </p:txBody>
-      </p:sp>
-      <p:sp>
-        <p:nvSpPr>
-          <p:cNvPr id="49" name="Shape 47"/>
-          <p:cNvSpPr/>
-          <p:nvPr/>
-        </p:nvSpPr>
-        <p:spPr>
-          <a:xfrm>
-            <a:off x="7447135" y="4169664"/>
-            <a:ext cx="685800" cy="475488"/>
-          </a:xfrm>
-          <a:prstGeom prst="rect">
-            <a:avLst>
-              <a:gd name="adj" fmla="val 7692"/>
-            </a:avLst>
-          </a:prstGeom>
-          <a:solidFill>
-            <a:srgbClr val="FFFFFF"/>
-          </a:solidFill>
-          <a:ln w="12700">
-            <a:solidFill>
-              <a:srgbClr val="DB2777"/>
-            </a:solidFill>
-            <a:prstDash val="solid"/>
-          </a:ln>
-        </p:spPr>
-      </p:sp>
-      <p:sp>
-        <p:nvSpPr>
-          <p:cNvPr id="50" name="Text 48"/>
-          <p:cNvSpPr/>
-          <p:nvPr/>
-        </p:nvSpPr>
-        <p:spPr>
-          <a:xfrm>
-            <a:off x="7447135" y="4169664"/>
-            <a:ext cx="685800" cy="475488"/>
-          </a:xfrm>
-          <a:prstGeom prst="rect">
-            <a:avLst/>
-          </a:prstGeom>
-          <a:noFill/>
-          <a:ln/>
-        </p:spPr>
-        <p:txBody>
-          <a:bodyPr wrap="square" lIns="0" tIns="0" rIns="0" bIns="0" rtlCol="0" anchor="ctr"/>
-          <a:lstStyle/>
-          <a:p>
-            <a:pPr algn="ctr" indent="0" marL="0">
-              <a:buNone/>
-            </a:pPr>
-            <a:r>
-              <a:rPr lang="en-US" sz="900" b="1" dirty="0">
-                <a:solidFill>
-                  <a:srgbClr val="9D174D"/>
-                </a:solidFill>
-                <a:latin typeface="Trebuchet MS" pitchFamily="34" charset="0"/>
-                <a:ea typeface="Trebuchet MS" pitchFamily="34" charset="-122"/>
-                <a:cs typeface="Trebuchet MS" pitchFamily="34" charset="-120"/>
-              </a:rPr>
-              <a:t>n</a:t>
+              <a:t>en</a:t>
             </a:r>
             <a:endParaRPr lang="en-US" sz="900" dirty="0"/>
           </a:p>
@@ -12921,7 +12855,7 @@
                 <a:ea typeface="Calibri" pitchFamily="34" charset="-122"/>
                 <a:cs typeface="Calibri" pitchFamily="34" charset="-120"/>
               </a:rPr>
-              <a:t>full of, characterised by</a:t>
+              <a:t>full of, having the quality of</a:t>
             </a:r>
             <a:endParaRPr lang="en-US" sz="850" dirty="0"/>
           </a:p>
@@ -13906,7 +13840,7 @@
                 <a:ea typeface="Calibri" pitchFamily="34" charset="-122"/>
                 <a:cs typeface="Calibri" pitchFamily="34" charset="-120"/>
               </a:rPr>
-              <a:t>full of, characterised by</a:t>
+              <a:t>full of, having the quality of</a:t>
             </a:r>
             <a:endParaRPr lang="en-US" sz="850" dirty="0"/>
           </a:p>
@@ -15288,7 +15222,7 @@
                 <a:ea typeface="Calibri" pitchFamily="34" charset="-122"/>
                 <a:cs typeface="Calibri" pitchFamily="34" charset="-120"/>
               </a:rPr>
-              <a:t>full of, characterised by</a:t>
+              <a:t>full of, having the quality of</a:t>
             </a:r>
             <a:endParaRPr lang="en-US" sz="850" dirty="0"/>
           </a:p>
@@ -15909,7 +15843,7 @@
                 <a:ea typeface="Trebuchet MS" pitchFamily="34" charset="-122"/>
                 <a:cs typeface="Trebuchet MS" pitchFamily="34" charset="-120"/>
               </a:rPr>
-              <a:t>f</a:t>
+              <a:t>e</a:t>
             </a:r>
             <a:endParaRPr lang="en-US" sz="900" dirty="0"/>
           </a:p>
@@ -15975,7 +15909,7 @@
                 <a:ea typeface="Trebuchet MS" pitchFamily="34" charset="-122"/>
                 <a:cs typeface="Trebuchet MS" pitchFamily="34" charset="-120"/>
               </a:rPr>
-              <a:t>u</a:t>
+              <a:t>f</a:t>
             </a:r>
             <a:endParaRPr lang="en-US" sz="900" dirty="0"/>
           </a:p>
@@ -16041,7 +15975,7 @@
                 <a:ea typeface="Trebuchet MS" pitchFamily="34" charset="-122"/>
                 <a:cs typeface="Trebuchet MS" pitchFamily="34" charset="-120"/>
               </a:rPr>
-              <a:t>l</a:t>
+              <a:t>ul</a:t>
             </a:r>
             <a:endParaRPr lang="en-US" sz="900" dirty="0"/>
           </a:p>
@@ -17359,20 +17293,6 @@
               <a:buNone/>
             </a:pPr>
             <a:r>
-              <a:rPr lang="en-US" sz="1800" dirty="0">
-                <a:solidFill>
-                  <a:srgbClr val="0F172A"/>
-                </a:solidFill>
-                <a:latin typeface="Calibri" pitchFamily="34" charset="0"/>
-                <a:ea typeface="Calibri" pitchFamily="34" charset="-122"/>
-                <a:cs typeface="Calibri" pitchFamily="34" charset="-120"/>
-              </a:rPr>
-              <a:t>Although he was </a:t>
-            </a:r>
-            <a:pPr algn="l" indent="0" marL="0">
-              <a:buNone/>
-            </a:pPr>
-            <a:r>
               <a:rPr lang="en-US" sz="1800" b="1" dirty="0">
                 <a:solidFill>
                   <a:srgbClr val="0D9488"/>
@@ -17384,7 +17304,7 @@
                 <a:ea typeface="Calibri" pitchFamily="34" charset="-122"/>
                 <a:cs typeface="Calibri" pitchFamily="34" charset="-120"/>
               </a:rPr>
-              <a:t>awake</a:t>
+              <a:t>Waking</a:t>
             </a:r>
             <a:pPr algn="l" indent="0" marL="0">
               <a:buNone/>
@@ -17398,7 +17318,7 @@
                 <a:ea typeface="Calibri" pitchFamily="34" charset="-122"/>
                 <a:cs typeface="Calibri" pitchFamily="34" charset="-120"/>
               </a:rPr>
-              <a:t>, his </a:t>
+              <a:t> early is easy for Dad, but his </a:t>
             </a:r>
             <a:pPr algn="l" indent="0" marL="0">
               <a:buNone/>
@@ -17415,7 +17335,7 @@
                 <a:ea typeface="Calibri" pitchFamily="34" charset="-122"/>
                 <a:cs typeface="Calibri" pitchFamily="34" charset="-120"/>
               </a:rPr>
-              <a:t>waking</a:t>
+              <a:t>wakefulness</a:t>
             </a:r>
             <a:pPr algn="l" indent="0" marL="0">
               <a:buNone/>
@@ -17429,7 +17349,7 @@
                 <a:ea typeface="Calibri" pitchFamily="34" charset="-122"/>
                 <a:cs typeface="Calibri" pitchFamily="34" charset="-120"/>
               </a:rPr>
-              <a:t> thoughts were confused, and it took a loud sound to fully </a:t>
+              <a:t> bothers Mum, who preferred to be </a:t>
             </a:r>
             <a:pPr algn="l" indent="0" marL="0">
               <a:buNone/>
@@ -17446,7 +17366,7 @@
                 <a:ea typeface="Calibri" pitchFamily="34" charset="-122"/>
                 <a:cs typeface="Calibri" pitchFamily="34" charset="-120"/>
               </a:rPr>
-              <a:t>awaken</a:t>
+              <a:t>rewoken</a:t>
             </a:r>
             <a:pPr algn="l" indent="0" marL="0">
               <a:buNone/>
@@ -17460,7 +17380,7 @@
                 <a:ea typeface="Calibri" pitchFamily="34" charset="-122"/>
                 <a:cs typeface="Calibri" pitchFamily="34" charset="-120"/>
               </a:rPr>
-              <a:t> his senses.</a:t>
+              <a:t> gently.</a:t>
             </a:r>
             <a:endParaRPr lang="en-US" sz="1800" dirty="0"/>
           </a:p>
@@ -17615,7 +17535,7 @@
                 <a:ea typeface="Trebuchet MS" pitchFamily="34" charset="-122"/>
                 <a:cs typeface="Trebuchet MS" pitchFamily="34" charset="-120"/>
               </a:rPr>
-              <a:t>awake</a:t>
+              <a:t>waking</a:t>
             </a:r>
             <a:endParaRPr lang="en-US" sz="1400" dirty="0"/>
           </a:p>
@@ -17743,7 +17663,7 @@
                 <a:ea typeface="Trebuchet MS" pitchFamily="34" charset="-122"/>
                 <a:cs typeface="Trebuchet MS" pitchFamily="34" charset="-120"/>
               </a:rPr>
-              <a:t>waking</a:t>
+              <a:t>wakefulness</a:t>
             </a:r>
             <a:endParaRPr lang="en-US" sz="1400" dirty="0"/>
           </a:p>
@@ -17871,7 +17791,7 @@
                 <a:ea typeface="Trebuchet MS" pitchFamily="34" charset="-122"/>
                 <a:cs typeface="Trebuchet MS" pitchFamily="34" charset="-120"/>
               </a:rPr>
-              <a:t>awaken</a:t>
+              <a:t>rewoken</a:t>
             </a:r>
             <a:endParaRPr lang="en-US" sz="1400" dirty="0"/>
           </a:p>
@@ -18341,7 +18261,7 @@
                 <a:ea typeface="Trebuchet MS" pitchFamily="34" charset="-122"/>
                 <a:cs typeface="Trebuchet MS" pitchFamily="34" charset="-120"/>
               </a:rPr>
-              <a:t>awake</a:t>
+              <a:t>waking</a:t>
             </a:r>
             <a:endParaRPr lang="en-US" sz="2800" dirty="0"/>
           </a:p>
@@ -19168,7 +19088,7 @@
                 <a:ea typeface="Trebuchet MS" pitchFamily="34" charset="-122"/>
                 <a:cs typeface="Trebuchet MS" pitchFamily="34" charset="-120"/>
               </a:rPr>
-              <a:t>awake</a:t>
+              <a:t>waking</a:t>
             </a:r>
             <a:endParaRPr lang="en-US" sz="2800" dirty="0"/>
           </a:p>
@@ -19257,11 +19177,11 @@
             </a:avLst>
           </a:prstGeom>
           <a:solidFill>
-            <a:srgbClr val="DDD6FE"/>
+            <a:srgbClr val="CCFBF1"/>
           </a:solidFill>
           <a:ln w="19050">
             <a:solidFill>
-              <a:srgbClr val="7C3AED"/>
+              <a:srgbClr val="0D9488"/>
             </a:solidFill>
             <a:prstDash val="solid"/>
           </a:ln>
@@ -19301,13 +19221,13 @@
             <a:r>
               <a:rPr lang="en-US" sz="1300" b="1" dirty="0">
                 <a:solidFill>
-                  <a:srgbClr val="4C1D95"/>
+                  <a:srgbClr val="0F766E"/>
                 </a:solidFill>
                 <a:latin typeface="Trebuchet MS" pitchFamily="34" charset="0"/>
                 <a:ea typeface="Trebuchet MS" pitchFamily="34" charset="-122"/>
                 <a:cs typeface="Trebuchet MS" pitchFamily="34" charset="-120"/>
               </a:rPr>
-              <a:t>a</a:t>
+              <a:t>wake</a:t>
             </a:r>
             <a:endParaRPr lang="en-US" sz="1300" dirty="0"/>
           </a:p>
@@ -19346,7 +19266,7 @@
                 <a:ea typeface="Calibri" pitchFamily="34" charset="-122"/>
                 <a:cs typeface="Calibri" pitchFamily="34" charset="-120"/>
               </a:rPr>
-              <a:t>on, in a state of</a:t>
+              <a:t>to rouse from sleep</a:t>
             </a:r>
             <a:endParaRPr lang="en-US" sz="850" dirty="0"/>
           </a:p>
@@ -19354,7 +19274,46 @@
       </p:sp>
       <p:sp>
         <p:nvSpPr>
-          <p:cNvPr id="19" name="Shape 17"/>
+          <p:cNvPr id="19" name="Text 17"/>
+          <p:cNvSpPr/>
+          <p:nvPr/>
+        </p:nvSpPr>
+        <p:spPr>
+          <a:xfrm>
+            <a:off x="2938272" y="2752344"/>
+            <a:ext cx="1828800" cy="182880"/>
+          </a:xfrm>
+          <a:prstGeom prst="rect">
+            <a:avLst/>
+          </a:prstGeom>
+          <a:noFill/>
+          <a:ln/>
+        </p:spPr>
+        <p:txBody>
+          <a:bodyPr wrap="square" lIns="0" tIns="0" rIns="0" bIns="0" rtlCol="0" anchor="t"/>
+          <a:lstStyle/>
+          <a:p>
+            <a:pPr algn="ctr" indent="0" marL="0">
+              <a:buNone/>
+            </a:pPr>
+            <a:r>
+              <a:rPr lang="en-US" sz="700" i="1" dirty="0">
+                <a:solidFill>
+                  <a:srgbClr val="94A3B8"/>
+                </a:solidFill>
+                <a:latin typeface="Calibri" pitchFamily="34" charset="0"/>
+                <a:ea typeface="Calibri" pitchFamily="34" charset="-122"/>
+                <a:cs typeface="Calibri" pitchFamily="34" charset="-120"/>
+              </a:rPr>
+              <a:t>'e' dropped before vowel suffix</a:t>
+            </a:r>
+            <a:endParaRPr lang="en-US" sz="700" dirty="0"/>
+          </a:p>
+        </p:txBody>
+      </p:sp>
+      <p:sp>
+        <p:nvSpPr>
+          <p:cNvPr id="20" name="Shape 18"/>
           <p:cNvSpPr/>
           <p:nvPr/>
         </p:nvSpPr>
@@ -19369,11 +19328,11 @@
             </a:avLst>
           </a:prstGeom>
           <a:solidFill>
-            <a:srgbClr val="CCFBF1"/>
+            <a:srgbClr val="FCE7F3"/>
           </a:solidFill>
           <a:ln w="19050">
             <a:solidFill>
-              <a:srgbClr val="0D9488"/>
+              <a:srgbClr val="DB2777"/>
             </a:solidFill>
             <a:prstDash val="solid"/>
           </a:ln>
@@ -19388,7 +19347,7 @@
       </p:sp>
       <p:sp>
         <p:nvSpPr>
-          <p:cNvPr id="20" name="Text 18"/>
+          <p:cNvPr id="21" name="Text 19"/>
           <p:cNvSpPr/>
           <p:nvPr/>
         </p:nvSpPr>
@@ -19413,13 +19372,13 @@
             <a:r>
               <a:rPr lang="en-US" sz="1300" b="1" dirty="0">
                 <a:solidFill>
-                  <a:srgbClr val="0F766E"/>
+                  <a:srgbClr val="9D174D"/>
                 </a:solidFill>
                 <a:latin typeface="Trebuchet MS" pitchFamily="34" charset="0"/>
                 <a:ea typeface="Trebuchet MS" pitchFamily="34" charset="-122"/>
                 <a:cs typeface="Trebuchet MS" pitchFamily="34" charset="-120"/>
               </a:rPr>
-              <a:t>wake</a:t>
+              <a:t>ing</a:t>
             </a:r>
             <a:endParaRPr lang="en-US" sz="1300" dirty="0"/>
           </a:p>
@@ -19427,7 +19386,7 @@
       </p:sp>
       <p:sp>
         <p:nvSpPr>
-          <p:cNvPr id="21" name="Text 19"/>
+          <p:cNvPr id="22" name="Text 20"/>
           <p:cNvSpPr/>
           <p:nvPr/>
         </p:nvSpPr>
@@ -19458,7 +19417,7 @@
                 <a:ea typeface="Calibri" pitchFamily="34" charset="-122"/>
                 <a:cs typeface="Calibri" pitchFamily="34" charset="-120"/>
               </a:rPr>
-              <a:t>to rouse from sleep</a:t>
+              <a:t>action in progress</a:t>
             </a:r>
             <a:endParaRPr lang="en-US" sz="850" dirty="0"/>
           </a:p>
@@ -19466,7 +19425,7 @@
       </p:sp>
       <p:sp>
         <p:nvSpPr>
-          <p:cNvPr id="22" name="Shape 20"/>
+          <p:cNvPr id="23" name="Shape 21"/>
           <p:cNvSpPr/>
           <p:nvPr/>
         </p:nvSpPr>
@@ -19493,7 +19452,7 @@
       </p:sp>
       <p:sp>
         <p:nvSpPr>
-          <p:cNvPr id="23" name="Text 21"/>
+          <p:cNvPr id="24" name="Text 22"/>
           <p:cNvSpPr/>
           <p:nvPr/>
         </p:nvSpPr>
@@ -19532,7 +19491,7 @@
       </p:sp>
       <p:sp>
         <p:nvSpPr>
-          <p:cNvPr id="24" name="Shape 22"/>
+          <p:cNvPr id="25" name="Shape 23"/>
           <p:cNvSpPr/>
           <p:nvPr/>
         </p:nvSpPr>
@@ -19559,7 +19518,7 @@
       </p:sp>
       <p:sp>
         <p:nvSpPr>
-          <p:cNvPr id="25" name="Text 23"/>
+          <p:cNvPr id="26" name="Text 24"/>
           <p:cNvSpPr/>
           <p:nvPr/>
         </p:nvSpPr>
@@ -19598,7 +19557,7 @@
       </p:sp>
       <p:sp>
         <p:nvSpPr>
-          <p:cNvPr id="26" name="Shape 24"/>
+          <p:cNvPr id="27" name="Shape 25"/>
           <p:cNvSpPr/>
           <p:nvPr/>
         </p:nvSpPr>
@@ -19625,7 +19584,7 @@
       </p:sp>
       <p:sp>
         <p:nvSpPr>
-          <p:cNvPr id="27" name="Text 25"/>
+          <p:cNvPr id="28" name="Text 26"/>
           <p:cNvSpPr/>
           <p:nvPr/>
         </p:nvSpPr>
@@ -19664,7 +19623,7 @@
       </p:sp>
       <p:sp>
         <p:nvSpPr>
-          <p:cNvPr id="28" name="Shape 26"/>
+          <p:cNvPr id="29" name="Shape 27"/>
           <p:cNvSpPr/>
           <p:nvPr/>
         </p:nvSpPr>
@@ -19691,7 +19650,7 @@
       </p:sp>
       <p:sp>
         <p:nvSpPr>
-          <p:cNvPr id="29" name="Text 27"/>
+          <p:cNvPr id="30" name="Text 28"/>
           <p:cNvSpPr/>
           <p:nvPr/>
         </p:nvSpPr>
@@ -20153,7 +20112,7 @@
                 <a:ea typeface="Trebuchet MS" pitchFamily="34" charset="-122"/>
                 <a:cs typeface="Trebuchet MS" pitchFamily="34" charset="-120"/>
               </a:rPr>
-              <a:t>awake</a:t>
+              <a:t>waking</a:t>
             </a:r>
             <a:endParaRPr lang="en-US" sz="2800" dirty="0"/>
           </a:p>
@@ -20242,11 +20201,11 @@
             </a:avLst>
           </a:prstGeom>
           <a:solidFill>
-            <a:srgbClr val="DDD6FE"/>
+            <a:srgbClr val="CCFBF1"/>
           </a:solidFill>
           <a:ln w="19050">
             <a:solidFill>
-              <a:srgbClr val="7C3AED"/>
+              <a:srgbClr val="0D9488"/>
             </a:solidFill>
             <a:prstDash val="solid"/>
           </a:ln>
@@ -20286,13 +20245,13 @@
             <a:r>
               <a:rPr lang="en-US" sz="1300" b="1" dirty="0">
                 <a:solidFill>
-                  <a:srgbClr val="4C1D95"/>
+                  <a:srgbClr val="0F766E"/>
                 </a:solidFill>
                 <a:latin typeface="Trebuchet MS" pitchFamily="34" charset="0"/>
                 <a:ea typeface="Trebuchet MS" pitchFamily="34" charset="-122"/>
                 <a:cs typeface="Trebuchet MS" pitchFamily="34" charset="-120"/>
               </a:rPr>
-              <a:t>a</a:t>
+              <a:t>wake</a:t>
             </a:r>
             <a:endParaRPr lang="en-US" sz="1300" dirty="0"/>
           </a:p>
@@ -20331,7 +20290,7 @@
                 <a:ea typeface="Calibri" pitchFamily="34" charset="-122"/>
                 <a:cs typeface="Calibri" pitchFamily="34" charset="-120"/>
               </a:rPr>
-              <a:t>on, in a state of</a:t>
+              <a:t>to rouse from sleep</a:t>
             </a:r>
             <a:endParaRPr lang="en-US" sz="850" dirty="0"/>
           </a:p>
@@ -20339,7 +20298,46 @@
       </p:sp>
       <p:sp>
         <p:nvSpPr>
-          <p:cNvPr id="19" name="Shape 17"/>
+          <p:cNvPr id="19" name="Text 17"/>
+          <p:cNvSpPr/>
+          <p:nvPr/>
+        </p:nvSpPr>
+        <p:spPr>
+          <a:xfrm>
+            <a:off x="2938272" y="2752344"/>
+            <a:ext cx="1828800" cy="182880"/>
+          </a:xfrm>
+          <a:prstGeom prst="rect">
+            <a:avLst/>
+          </a:prstGeom>
+          <a:noFill/>
+          <a:ln/>
+        </p:spPr>
+        <p:txBody>
+          <a:bodyPr wrap="square" lIns="0" tIns="0" rIns="0" bIns="0" rtlCol="0" anchor="t"/>
+          <a:lstStyle/>
+          <a:p>
+            <a:pPr algn="ctr" indent="0" marL="0">
+              <a:buNone/>
+            </a:pPr>
+            <a:r>
+              <a:rPr lang="en-US" sz="700" i="1" dirty="0">
+                <a:solidFill>
+                  <a:srgbClr val="94A3B8"/>
+                </a:solidFill>
+                <a:latin typeface="Calibri" pitchFamily="34" charset="0"/>
+                <a:ea typeface="Calibri" pitchFamily="34" charset="-122"/>
+                <a:cs typeface="Calibri" pitchFamily="34" charset="-120"/>
+              </a:rPr>
+              <a:t>'e' dropped before vowel suffix</a:t>
+            </a:r>
+            <a:endParaRPr lang="en-US" sz="700" dirty="0"/>
+          </a:p>
+        </p:txBody>
+      </p:sp>
+      <p:sp>
+        <p:nvSpPr>
+          <p:cNvPr id="20" name="Shape 18"/>
           <p:cNvSpPr/>
           <p:nvPr/>
         </p:nvSpPr>
@@ -20354,11 +20352,11 @@
             </a:avLst>
           </a:prstGeom>
           <a:solidFill>
-            <a:srgbClr val="CCFBF1"/>
+            <a:srgbClr val="FCE7F3"/>
           </a:solidFill>
           <a:ln w="19050">
             <a:solidFill>
-              <a:srgbClr val="0D9488"/>
+              <a:srgbClr val="DB2777"/>
             </a:solidFill>
             <a:prstDash val="solid"/>
           </a:ln>
@@ -20373,7 +20371,7 @@
       </p:sp>
       <p:sp>
         <p:nvSpPr>
-          <p:cNvPr id="20" name="Text 18"/>
+          <p:cNvPr id="21" name="Text 19"/>
           <p:cNvSpPr/>
           <p:nvPr/>
         </p:nvSpPr>
@@ -20398,13 +20396,13 @@
             <a:r>
               <a:rPr lang="en-US" sz="1300" b="1" dirty="0">
                 <a:solidFill>
-                  <a:srgbClr val="0F766E"/>
+                  <a:srgbClr val="9D174D"/>
                 </a:solidFill>
                 <a:latin typeface="Trebuchet MS" pitchFamily="34" charset="0"/>
                 <a:ea typeface="Trebuchet MS" pitchFamily="34" charset="-122"/>
                 <a:cs typeface="Trebuchet MS" pitchFamily="34" charset="-120"/>
               </a:rPr>
-              <a:t>wake</a:t>
+              <a:t>ing</a:t>
             </a:r>
             <a:endParaRPr lang="en-US" sz="1300" dirty="0"/>
           </a:p>
@@ -20412,7 +20410,7 @@
       </p:sp>
       <p:sp>
         <p:nvSpPr>
-          <p:cNvPr id="21" name="Text 19"/>
+          <p:cNvPr id="22" name="Text 20"/>
           <p:cNvSpPr/>
           <p:nvPr/>
         </p:nvSpPr>
@@ -20443,7 +20441,7 @@
                 <a:ea typeface="Calibri" pitchFamily="34" charset="-122"/>
                 <a:cs typeface="Calibri" pitchFamily="34" charset="-120"/>
               </a:rPr>
-              <a:t>to rouse from sleep</a:t>
+              <a:t>action in progress</a:t>
             </a:r>
             <a:endParaRPr lang="en-US" sz="850" dirty="0"/>
           </a:p>
@@ -20451,7 +20449,7 @@
       </p:sp>
       <p:sp>
         <p:nvSpPr>
-          <p:cNvPr id="22" name="Shape 20"/>
+          <p:cNvPr id="23" name="Shape 21"/>
           <p:cNvSpPr/>
           <p:nvPr/>
         </p:nvSpPr>
@@ -20478,7 +20476,7 @@
       </p:sp>
       <p:sp>
         <p:nvSpPr>
-          <p:cNvPr id="23" name="Text 21"/>
+          <p:cNvPr id="24" name="Text 22"/>
           <p:cNvSpPr/>
           <p:nvPr/>
         </p:nvSpPr>
@@ -20517,7 +20515,7 @@
       </p:sp>
       <p:sp>
         <p:nvSpPr>
-          <p:cNvPr id="24" name="Shape 22"/>
+          <p:cNvPr id="25" name="Shape 23"/>
           <p:cNvSpPr/>
           <p:nvPr/>
         </p:nvSpPr>
@@ -20544,7 +20542,7 @@
       </p:sp>
       <p:sp>
         <p:nvSpPr>
-          <p:cNvPr id="25" name="Shape 23"/>
+          <p:cNvPr id="26" name="Shape 24"/>
           <p:cNvSpPr/>
           <p:nvPr/>
         </p:nvSpPr>
@@ -20571,7 +20569,7 @@
       </p:sp>
       <p:sp>
         <p:nvSpPr>
-          <p:cNvPr id="26" name="Text 24"/>
+          <p:cNvPr id="27" name="Text 25"/>
           <p:cNvSpPr/>
           <p:nvPr/>
         </p:nvSpPr>
@@ -20602,7 +20600,7 @@
                 <a:ea typeface="Trebuchet MS" pitchFamily="34" charset="-122"/>
                 <a:cs typeface="Trebuchet MS" pitchFamily="34" charset="-120"/>
               </a:rPr>
-              <a:t>a</a:t>
+              <a:t>wa</a:t>
             </a:r>
             <a:endParaRPr lang="en-US" sz="1400" dirty="0"/>
           </a:p>
@@ -20610,7 +20608,7 @@
       </p:sp>
       <p:sp>
         <p:nvSpPr>
-          <p:cNvPr id="27" name="Text 25"/>
+          <p:cNvPr id="28" name="Text 26"/>
           <p:cNvSpPr/>
           <p:nvPr/>
         </p:nvSpPr>
@@ -20649,7 +20647,7 @@
       </p:sp>
       <p:sp>
         <p:nvSpPr>
-          <p:cNvPr id="28" name="Shape 26"/>
+          <p:cNvPr id="29" name="Shape 27"/>
           <p:cNvSpPr/>
           <p:nvPr/>
         </p:nvSpPr>
@@ -20676,7 +20674,7 @@
       </p:sp>
       <p:sp>
         <p:nvSpPr>
-          <p:cNvPr id="29" name="Text 27"/>
+          <p:cNvPr id="30" name="Text 28"/>
           <p:cNvSpPr/>
           <p:nvPr/>
         </p:nvSpPr>
@@ -20707,7 +20705,7 @@
                 <a:ea typeface="Trebuchet MS" pitchFamily="34" charset="-122"/>
                 <a:cs typeface="Trebuchet MS" pitchFamily="34" charset="-120"/>
               </a:rPr>
-              <a:t>wake</a:t>
+              <a:t>king</a:t>
             </a:r>
             <a:endParaRPr lang="en-US" sz="1400" dirty="0"/>
           </a:p>
@@ -20715,7 +20713,7 @@
       </p:sp>
       <p:sp>
         <p:nvSpPr>
-          <p:cNvPr id="30" name="Shape 28"/>
+          <p:cNvPr id="31" name="Shape 29"/>
           <p:cNvSpPr/>
           <p:nvPr/>
         </p:nvSpPr>
@@ -20742,7 +20740,7 @@
       </p:sp>
       <p:sp>
         <p:nvSpPr>
-          <p:cNvPr id="31" name="Text 29"/>
+          <p:cNvPr id="32" name="Text 30"/>
           <p:cNvSpPr/>
           <p:nvPr/>
         </p:nvSpPr>
@@ -20781,7 +20779,7 @@
       </p:sp>
       <p:sp>
         <p:nvSpPr>
-          <p:cNvPr id="32" name="Shape 30"/>
+          <p:cNvPr id="33" name="Shape 31"/>
           <p:cNvSpPr/>
           <p:nvPr/>
         </p:nvSpPr>
@@ -20808,7 +20806,7 @@
       </p:sp>
       <p:sp>
         <p:nvSpPr>
-          <p:cNvPr id="33" name="Text 31"/>
+          <p:cNvPr id="34" name="Text 32"/>
           <p:cNvSpPr/>
           <p:nvPr/>
         </p:nvSpPr>
@@ -21270,7 +21268,7 @@
                 <a:ea typeface="Trebuchet MS" pitchFamily="34" charset="-122"/>
                 <a:cs typeface="Trebuchet MS" pitchFamily="34" charset="-120"/>
               </a:rPr>
-              <a:t>awake</a:t>
+              <a:t>waking</a:t>
             </a:r>
             <a:endParaRPr lang="en-US" sz="2800" dirty="0"/>
           </a:p>
@@ -21359,11 +21357,11 @@
             </a:avLst>
           </a:prstGeom>
           <a:solidFill>
-            <a:srgbClr val="DDD6FE"/>
+            <a:srgbClr val="CCFBF1"/>
           </a:solidFill>
           <a:ln w="19050">
             <a:solidFill>
-              <a:srgbClr val="7C3AED"/>
+              <a:srgbClr val="0D9488"/>
             </a:solidFill>
             <a:prstDash val="solid"/>
           </a:ln>
@@ -21403,13 +21401,13 @@
             <a:r>
               <a:rPr lang="en-US" sz="1300" b="1" dirty="0">
                 <a:solidFill>
-                  <a:srgbClr val="4C1D95"/>
+                  <a:srgbClr val="0F766E"/>
                 </a:solidFill>
                 <a:latin typeface="Trebuchet MS" pitchFamily="34" charset="0"/>
                 <a:ea typeface="Trebuchet MS" pitchFamily="34" charset="-122"/>
                 <a:cs typeface="Trebuchet MS" pitchFamily="34" charset="-120"/>
               </a:rPr>
-              <a:t>a</a:t>
+              <a:t>wake</a:t>
             </a:r>
             <a:endParaRPr lang="en-US" sz="1300" dirty="0"/>
           </a:p>
@@ -21448,7 +21446,7 @@
                 <a:ea typeface="Calibri" pitchFamily="34" charset="-122"/>
                 <a:cs typeface="Calibri" pitchFamily="34" charset="-120"/>
               </a:rPr>
-              <a:t>on, in a state of</a:t>
+              <a:t>to rouse from sleep</a:t>
             </a:r>
             <a:endParaRPr lang="en-US" sz="850" dirty="0"/>
           </a:p>
@@ -21456,7 +21454,46 @@
       </p:sp>
       <p:sp>
         <p:nvSpPr>
-          <p:cNvPr id="19" name="Shape 17"/>
+          <p:cNvPr id="19" name="Text 17"/>
+          <p:cNvSpPr/>
+          <p:nvPr/>
+        </p:nvSpPr>
+        <p:spPr>
+          <a:xfrm>
+            <a:off x="2938272" y="2752344"/>
+            <a:ext cx="1828800" cy="182880"/>
+          </a:xfrm>
+          <a:prstGeom prst="rect">
+            <a:avLst/>
+          </a:prstGeom>
+          <a:noFill/>
+          <a:ln/>
+        </p:spPr>
+        <p:txBody>
+          <a:bodyPr wrap="square" lIns="0" tIns="0" rIns="0" bIns="0" rtlCol="0" anchor="t"/>
+          <a:lstStyle/>
+          <a:p>
+            <a:pPr algn="ctr" indent="0" marL="0">
+              <a:buNone/>
+            </a:pPr>
+            <a:r>
+              <a:rPr lang="en-US" sz="700" i="1" dirty="0">
+                <a:solidFill>
+                  <a:srgbClr val="94A3B8"/>
+                </a:solidFill>
+                <a:latin typeface="Calibri" pitchFamily="34" charset="0"/>
+                <a:ea typeface="Calibri" pitchFamily="34" charset="-122"/>
+                <a:cs typeface="Calibri" pitchFamily="34" charset="-120"/>
+              </a:rPr>
+              <a:t>'e' dropped before vowel suffix</a:t>
+            </a:r>
+            <a:endParaRPr lang="en-US" sz="700" dirty="0"/>
+          </a:p>
+        </p:txBody>
+      </p:sp>
+      <p:sp>
+        <p:nvSpPr>
+          <p:cNvPr id="20" name="Shape 18"/>
           <p:cNvSpPr/>
           <p:nvPr/>
         </p:nvSpPr>
@@ -21471,11 +21508,11 @@
             </a:avLst>
           </a:prstGeom>
           <a:solidFill>
-            <a:srgbClr val="CCFBF1"/>
+            <a:srgbClr val="FCE7F3"/>
           </a:solidFill>
           <a:ln w="19050">
             <a:solidFill>
-              <a:srgbClr val="0D9488"/>
+              <a:srgbClr val="DB2777"/>
             </a:solidFill>
             <a:prstDash val="solid"/>
           </a:ln>
@@ -21490,7 +21527,7 @@
       </p:sp>
       <p:sp>
         <p:nvSpPr>
-          <p:cNvPr id="20" name="Text 18"/>
+          <p:cNvPr id="21" name="Text 19"/>
           <p:cNvSpPr/>
           <p:nvPr/>
         </p:nvSpPr>
@@ -21515,13 +21552,13 @@
             <a:r>
               <a:rPr lang="en-US" sz="1300" b="1" dirty="0">
                 <a:solidFill>
-                  <a:srgbClr val="0F766E"/>
+                  <a:srgbClr val="9D174D"/>
                 </a:solidFill>
                 <a:latin typeface="Trebuchet MS" pitchFamily="34" charset="0"/>
                 <a:ea typeface="Trebuchet MS" pitchFamily="34" charset="-122"/>
                 <a:cs typeface="Trebuchet MS" pitchFamily="34" charset="-120"/>
               </a:rPr>
-              <a:t>wake</a:t>
+              <a:t>ing</a:t>
             </a:r>
             <a:endParaRPr lang="en-US" sz="1300" dirty="0"/>
           </a:p>
@@ -21529,7 +21566,7 @@
       </p:sp>
       <p:sp>
         <p:nvSpPr>
-          <p:cNvPr id="21" name="Text 19"/>
+          <p:cNvPr id="22" name="Text 20"/>
           <p:cNvSpPr/>
           <p:nvPr/>
         </p:nvSpPr>
@@ -21560,7 +21597,7 @@
                 <a:ea typeface="Calibri" pitchFamily="34" charset="-122"/>
                 <a:cs typeface="Calibri" pitchFamily="34" charset="-120"/>
               </a:rPr>
-              <a:t>to rouse from sleep</a:t>
+              <a:t>action in progress</a:t>
             </a:r>
             <a:endParaRPr lang="en-US" sz="850" dirty="0"/>
           </a:p>
@@ -21568,7 +21605,7 @@
       </p:sp>
       <p:sp>
         <p:nvSpPr>
-          <p:cNvPr id="22" name="Shape 20"/>
+          <p:cNvPr id="23" name="Shape 21"/>
           <p:cNvSpPr/>
           <p:nvPr/>
         </p:nvSpPr>
@@ -21595,7 +21632,7 @@
       </p:sp>
       <p:sp>
         <p:nvSpPr>
-          <p:cNvPr id="23" name="Text 21"/>
+          <p:cNvPr id="24" name="Text 22"/>
           <p:cNvSpPr/>
           <p:nvPr/>
         </p:nvSpPr>
@@ -21634,7 +21671,7 @@
       </p:sp>
       <p:sp>
         <p:nvSpPr>
-          <p:cNvPr id="24" name="Shape 22"/>
+          <p:cNvPr id="25" name="Shape 23"/>
           <p:cNvSpPr/>
           <p:nvPr/>
         </p:nvSpPr>
@@ -21661,7 +21698,7 @@
       </p:sp>
       <p:sp>
         <p:nvSpPr>
-          <p:cNvPr id="25" name="Shape 23"/>
+          <p:cNvPr id="26" name="Shape 24"/>
           <p:cNvSpPr/>
           <p:nvPr/>
         </p:nvSpPr>
@@ -21688,7 +21725,7 @@
       </p:sp>
       <p:sp>
         <p:nvSpPr>
-          <p:cNvPr id="26" name="Text 24"/>
+          <p:cNvPr id="27" name="Text 25"/>
           <p:cNvSpPr/>
           <p:nvPr/>
         </p:nvSpPr>
@@ -21719,7 +21756,7 @@
                 <a:ea typeface="Trebuchet MS" pitchFamily="34" charset="-122"/>
                 <a:cs typeface="Trebuchet MS" pitchFamily="34" charset="-120"/>
               </a:rPr>
-              <a:t>a</a:t>
+              <a:t>wa</a:t>
             </a:r>
             <a:endParaRPr lang="en-US" sz="1400" dirty="0"/>
           </a:p>
@@ -21727,7 +21764,7 @@
       </p:sp>
       <p:sp>
         <p:nvSpPr>
-          <p:cNvPr id="27" name="Text 25"/>
+          <p:cNvPr id="28" name="Text 26"/>
           <p:cNvSpPr/>
           <p:nvPr/>
         </p:nvSpPr>
@@ -21766,7 +21803,7 @@
       </p:sp>
       <p:sp>
         <p:nvSpPr>
-          <p:cNvPr id="28" name="Shape 26"/>
+          <p:cNvPr id="29" name="Shape 27"/>
           <p:cNvSpPr/>
           <p:nvPr/>
         </p:nvSpPr>
@@ -21793,7 +21830,7 @@
       </p:sp>
       <p:sp>
         <p:nvSpPr>
-          <p:cNvPr id="29" name="Text 27"/>
+          <p:cNvPr id="30" name="Text 28"/>
           <p:cNvSpPr/>
           <p:nvPr/>
         </p:nvSpPr>
@@ -21824,7 +21861,7 @@
                 <a:ea typeface="Trebuchet MS" pitchFamily="34" charset="-122"/>
                 <a:cs typeface="Trebuchet MS" pitchFamily="34" charset="-120"/>
               </a:rPr>
-              <a:t>wake</a:t>
+              <a:t>king</a:t>
             </a:r>
             <a:endParaRPr lang="en-US" sz="1400" dirty="0"/>
           </a:p>
@@ -21832,7 +21869,7 @@
       </p:sp>
       <p:sp>
         <p:nvSpPr>
-          <p:cNvPr id="30" name="Shape 28"/>
+          <p:cNvPr id="31" name="Shape 29"/>
           <p:cNvSpPr/>
           <p:nvPr/>
         </p:nvSpPr>
@@ -21859,7 +21896,7 @@
       </p:sp>
       <p:sp>
         <p:nvSpPr>
-          <p:cNvPr id="31" name="Text 29"/>
+          <p:cNvPr id="32" name="Text 30"/>
           <p:cNvSpPr/>
           <p:nvPr/>
         </p:nvSpPr>
@@ -21898,7 +21935,7 @@
       </p:sp>
       <p:sp>
         <p:nvSpPr>
-          <p:cNvPr id="32" name="Shape 30"/>
+          <p:cNvPr id="33" name="Shape 31"/>
           <p:cNvSpPr/>
           <p:nvPr/>
         </p:nvSpPr>
@@ -21925,13 +21962,13 @@
       </p:sp>
       <p:sp>
         <p:nvSpPr>
-          <p:cNvPr id="33" name="Shape 31"/>
-          <p:cNvSpPr/>
-          <p:nvPr/>
-        </p:nvSpPr>
-        <p:spPr>
-          <a:xfrm>
-            <a:off x="2427732" y="4169664"/>
+          <p:cNvPr id="34" name="Shape 32"/>
+          <p:cNvSpPr/>
+          <p:nvPr/>
+        </p:nvSpPr>
+        <p:spPr>
+          <a:xfrm>
+            <a:off x="2670048" y="4169664"/>
             <a:ext cx="685800" cy="475488"/>
           </a:xfrm>
           <a:prstGeom prst="rect">
@@ -21952,13 +21989,13 @@
       </p:sp>
       <p:sp>
         <p:nvSpPr>
-          <p:cNvPr id="34" name="Text 32"/>
-          <p:cNvSpPr/>
-          <p:nvPr/>
-        </p:nvSpPr>
-        <p:spPr>
-          <a:xfrm>
-            <a:off x="2427732" y="4169664"/>
+          <p:cNvPr id="35" name="Text 33"/>
+          <p:cNvSpPr/>
+          <p:nvPr/>
+        </p:nvSpPr>
+        <p:spPr>
+          <a:xfrm>
+            <a:off x="2670048" y="4169664"/>
             <a:ext cx="685800" cy="475488"/>
           </a:xfrm>
           <a:prstGeom prst="rect">
@@ -21983,7 +22020,7 @@
                 <a:ea typeface="Trebuchet MS" pitchFamily="34" charset="-122"/>
                 <a:cs typeface="Trebuchet MS" pitchFamily="34" charset="-120"/>
               </a:rPr>
-              <a:t>a</a:t>
+              <a:t>w</a:t>
             </a:r>
             <a:endParaRPr lang="en-US" sz="900" dirty="0"/>
           </a:p>
@@ -21991,13 +22028,13 @@
       </p:sp>
       <p:sp>
         <p:nvSpPr>
-          <p:cNvPr id="35" name="Shape 33"/>
-          <p:cNvSpPr/>
-          <p:nvPr/>
-        </p:nvSpPr>
-        <p:spPr>
-          <a:xfrm>
-            <a:off x="3639312" y="4169664"/>
+          <p:cNvPr id="36" name="Shape 34"/>
+          <p:cNvSpPr/>
+          <p:nvPr/>
+        </p:nvSpPr>
+        <p:spPr>
+          <a:xfrm>
+            <a:off x="4123944" y="4169664"/>
             <a:ext cx="685800" cy="475488"/>
           </a:xfrm>
           <a:prstGeom prst="rect">
@@ -22018,13 +22055,13 @@
       </p:sp>
       <p:sp>
         <p:nvSpPr>
-          <p:cNvPr id="36" name="Text 34"/>
-          <p:cNvSpPr/>
-          <p:nvPr/>
-        </p:nvSpPr>
-        <p:spPr>
-          <a:xfrm>
-            <a:off x="3639312" y="4169664"/>
+          <p:cNvPr id="37" name="Text 35"/>
+          <p:cNvSpPr/>
+          <p:nvPr/>
+        </p:nvSpPr>
+        <p:spPr>
+          <a:xfrm>
+            <a:off x="4123944" y="4169664"/>
             <a:ext cx="685800" cy="475488"/>
           </a:xfrm>
           <a:prstGeom prst="rect">
@@ -22049,7 +22086,7 @@
                 <a:ea typeface="Trebuchet MS" pitchFamily="34" charset="-122"/>
                 <a:cs typeface="Trebuchet MS" pitchFamily="34" charset="-120"/>
               </a:rPr>
-              <a:t>w</a:t>
+              <a:t>a</a:t>
             </a:r>
             <a:endParaRPr lang="en-US" sz="900" dirty="0"/>
           </a:p>
@@ -22057,13 +22094,13 @@
       </p:sp>
       <p:sp>
         <p:nvSpPr>
-          <p:cNvPr id="37" name="Shape 35"/>
-          <p:cNvSpPr/>
-          <p:nvPr/>
-        </p:nvSpPr>
-        <p:spPr>
-          <a:xfrm>
-            <a:off x="4850892" y="4169664"/>
+          <p:cNvPr id="38" name="Shape 36"/>
+          <p:cNvSpPr/>
+          <p:nvPr/>
+        </p:nvSpPr>
+        <p:spPr>
+          <a:xfrm>
+            <a:off x="5577840" y="4169664"/>
             <a:ext cx="685800" cy="475488"/>
           </a:xfrm>
           <a:prstGeom prst="rect">
@@ -22084,13 +22121,13 @@
       </p:sp>
       <p:sp>
         <p:nvSpPr>
-          <p:cNvPr id="38" name="Text 36"/>
-          <p:cNvSpPr/>
-          <p:nvPr/>
-        </p:nvSpPr>
-        <p:spPr>
-          <a:xfrm>
-            <a:off x="4850892" y="4169664"/>
+          <p:cNvPr id="39" name="Text 37"/>
+          <p:cNvSpPr/>
+          <p:nvPr/>
+        </p:nvSpPr>
+        <p:spPr>
+          <a:xfrm>
+            <a:off x="5577840" y="4169664"/>
             <a:ext cx="685800" cy="475488"/>
           </a:xfrm>
           <a:prstGeom prst="rect">
@@ -22115,7 +22152,7 @@
                 <a:ea typeface="Trebuchet MS" pitchFamily="34" charset="-122"/>
                 <a:cs typeface="Trebuchet MS" pitchFamily="34" charset="-120"/>
               </a:rPr>
-              <a:t>a</a:t>
+              <a:t>k</a:t>
             </a:r>
             <a:endParaRPr lang="en-US" sz="900" dirty="0"/>
           </a:p>
@@ -22123,13 +22160,13 @@
       </p:sp>
       <p:sp>
         <p:nvSpPr>
-          <p:cNvPr id="39" name="Shape 37"/>
-          <p:cNvSpPr/>
-          <p:nvPr/>
-        </p:nvSpPr>
-        <p:spPr>
-          <a:xfrm>
-            <a:off x="6062472" y="4169664"/>
+          <p:cNvPr id="40" name="Shape 38"/>
+          <p:cNvSpPr/>
+          <p:nvPr/>
+        </p:nvSpPr>
+        <p:spPr>
+          <a:xfrm>
+            <a:off x="7031736" y="4169664"/>
             <a:ext cx="685800" cy="475488"/>
           </a:xfrm>
           <a:prstGeom prst="rect">
@@ -22150,13 +22187,13 @@
       </p:sp>
       <p:sp>
         <p:nvSpPr>
-          <p:cNvPr id="40" name="Text 38"/>
-          <p:cNvSpPr/>
-          <p:nvPr/>
-        </p:nvSpPr>
-        <p:spPr>
-          <a:xfrm>
-            <a:off x="6062472" y="4169664"/>
+          <p:cNvPr id="41" name="Text 39"/>
+          <p:cNvSpPr/>
+          <p:nvPr/>
+        </p:nvSpPr>
+        <p:spPr>
+          <a:xfrm>
+            <a:off x="7031736" y="4169664"/>
             <a:ext cx="685800" cy="475488"/>
           </a:xfrm>
           <a:prstGeom prst="rect">
@@ -22181,73 +22218,7 @@
                 <a:ea typeface="Trebuchet MS" pitchFamily="34" charset="-122"/>
                 <a:cs typeface="Trebuchet MS" pitchFamily="34" charset="-120"/>
               </a:rPr>
-              <a:t>k</a:t>
-            </a:r>
-            <a:endParaRPr lang="en-US" sz="900" dirty="0"/>
-          </a:p>
-        </p:txBody>
-      </p:sp>
-      <p:sp>
-        <p:nvSpPr>
-          <p:cNvPr id="41" name="Shape 39"/>
-          <p:cNvSpPr/>
-          <p:nvPr/>
-        </p:nvSpPr>
-        <p:spPr>
-          <a:xfrm>
-            <a:off x="7274052" y="4169664"/>
-            <a:ext cx="685800" cy="475488"/>
-          </a:xfrm>
-          <a:prstGeom prst="rect">
-            <a:avLst>
-              <a:gd name="adj" fmla="val 7692"/>
-            </a:avLst>
-          </a:prstGeom>
-          <a:solidFill>
-            <a:srgbClr val="FFFFFF"/>
-          </a:solidFill>
-          <a:ln w="12700">
-            <a:solidFill>
-              <a:srgbClr val="DB2777"/>
-            </a:solidFill>
-            <a:prstDash val="solid"/>
-          </a:ln>
-        </p:spPr>
-      </p:sp>
-      <p:sp>
-        <p:nvSpPr>
-          <p:cNvPr id="42" name="Text 40"/>
-          <p:cNvSpPr/>
-          <p:nvPr/>
-        </p:nvSpPr>
-        <p:spPr>
-          <a:xfrm>
-            <a:off x="7274052" y="4169664"/>
-            <a:ext cx="685800" cy="475488"/>
-          </a:xfrm>
-          <a:prstGeom prst="rect">
-            <a:avLst/>
-          </a:prstGeom>
-          <a:noFill/>
-          <a:ln/>
-        </p:spPr>
-        <p:txBody>
-          <a:bodyPr wrap="square" lIns="0" tIns="0" rIns="0" bIns="0" rtlCol="0" anchor="ctr"/>
-          <a:lstStyle/>
-          <a:p>
-            <a:pPr algn="ctr" indent="0" marL="0">
-              <a:buNone/>
-            </a:pPr>
-            <a:r>
-              <a:rPr lang="en-US" sz="900" b="1" dirty="0">
-                <a:solidFill>
-                  <a:srgbClr val="9D174D"/>
-                </a:solidFill>
-                <a:latin typeface="Trebuchet MS" pitchFamily="34" charset="0"/>
-                <a:ea typeface="Trebuchet MS" pitchFamily="34" charset="-122"/>
-                <a:cs typeface="Trebuchet MS" pitchFamily="34" charset="-120"/>
-              </a:rPr>
-              <a:t>e</a:t>
+              <a:t>ing</a:t>
             </a:r>
             <a:endParaRPr lang="en-US" sz="900" dirty="0"/>
           </a:p>
@@ -22678,7 +22649,7 @@
                 <a:ea typeface="Trebuchet MS" pitchFamily="34" charset="-122"/>
                 <a:cs typeface="Trebuchet MS" pitchFamily="34" charset="-120"/>
               </a:rPr>
-              <a:t>waking</a:t>
+              <a:t>wakefulness</a:t>
             </a:r>
             <a:endParaRPr lang="en-US" sz="2800" dirty="0"/>
           </a:p>
@@ -23505,7 +23476,7 @@
                 <a:ea typeface="Trebuchet MS" pitchFamily="34" charset="-122"/>
                 <a:cs typeface="Trebuchet MS" pitchFamily="34" charset="-120"/>
               </a:rPr>
-              <a:t>waking</a:t>
+              <a:t>wakefulness</a:t>
             </a:r>
             <a:endParaRPr lang="en-US" sz="2800" dirty="0"/>
           </a:p>
@@ -23585,7 +23556,7 @@
         </p:nvSpPr>
         <p:spPr>
           <a:xfrm>
-            <a:off x="2938272" y="2258568"/>
+            <a:off x="2221992" y="2258568"/>
             <a:ext cx="1828800" cy="292608"/>
           </a:xfrm>
           <a:prstGeom prst="rect">
@@ -23619,7 +23590,7 @@
         </p:nvSpPr>
         <p:spPr>
           <a:xfrm>
-            <a:off x="2938272" y="2258568"/>
+            <a:off x="2221992" y="2258568"/>
             <a:ext cx="1828800" cy="292608"/>
           </a:xfrm>
           <a:prstGeom prst="rect">
@@ -23658,7 +23629,7 @@
         </p:nvSpPr>
         <p:spPr>
           <a:xfrm>
-            <a:off x="2938272" y="2569464"/>
+            <a:off x="2221992" y="2569464"/>
             <a:ext cx="1828800" cy="201168"/>
           </a:xfrm>
           <a:prstGeom prst="rect">
@@ -23697,7 +23668,7 @@
         </p:nvSpPr>
         <p:spPr>
           <a:xfrm>
-            <a:off x="5803392" y="2258568"/>
+            <a:off x="4370832" y="2258568"/>
             <a:ext cx="1828800" cy="292608"/>
           </a:xfrm>
           <a:prstGeom prst="rect">
@@ -23731,7 +23702,7 @@
         </p:nvSpPr>
         <p:spPr>
           <a:xfrm>
-            <a:off x="5803392" y="2258568"/>
+            <a:off x="4370832" y="2258568"/>
             <a:ext cx="1828800" cy="292608"/>
           </a:xfrm>
           <a:prstGeom prst="rect">
@@ -23756,7 +23727,7 @@
                 <a:ea typeface="Trebuchet MS" pitchFamily="34" charset="-122"/>
                 <a:cs typeface="Trebuchet MS" pitchFamily="34" charset="-120"/>
               </a:rPr>
-              <a:t>ing</a:t>
+              <a:t>ful</a:t>
             </a:r>
             <a:endParaRPr lang="en-US" sz="1300" dirty="0"/>
           </a:p>
@@ -23770,7 +23741,7 @@
         </p:nvSpPr>
         <p:spPr>
           <a:xfrm>
-            <a:off x="5803392" y="2569464"/>
+            <a:off x="4370832" y="2569464"/>
             <a:ext cx="1828800" cy="201168"/>
           </a:xfrm>
           <a:prstGeom prst="rect">
@@ -23795,7 +23766,7 @@
                 <a:ea typeface="Calibri" pitchFamily="34" charset="-122"/>
                 <a:cs typeface="Calibri" pitchFamily="34" charset="-120"/>
               </a:rPr>
-              <a:t>ongoing action or state</a:t>
+              <a:t>full of, having the quality of</a:t>
             </a:r>
             <a:endParaRPr lang="en-US" sz="850" dirty="0"/>
           </a:p>
@@ -23803,14 +23774,87 @@
       </p:sp>
       <p:sp>
         <p:nvSpPr>
-          <p:cNvPr id="22" name="Text 20"/>
-          <p:cNvSpPr/>
-          <p:nvPr/>
-        </p:nvSpPr>
-        <p:spPr>
-          <a:xfrm>
-            <a:off x="5803392" y="2752344"/>
-            <a:ext cx="1828800" cy="182880"/>
+          <p:cNvPr id="22" name="Shape 20"/>
+          <p:cNvSpPr/>
+          <p:nvPr/>
+        </p:nvSpPr>
+        <p:spPr>
+          <a:xfrm>
+            <a:off x="6519672" y="2258568"/>
+            <a:ext cx="1828800" cy="292608"/>
+          </a:xfrm>
+          <a:prstGeom prst="rect">
+            <a:avLst>
+              <a:gd name="adj" fmla="val 25000"/>
+            </a:avLst>
+          </a:prstGeom>
+          <a:solidFill>
+            <a:srgbClr val="FCE7F3"/>
+          </a:solidFill>
+          <a:ln w="19050">
+            <a:solidFill>
+              <a:srgbClr val="DB2777"/>
+            </a:solidFill>
+            <a:prstDash val="solid"/>
+          </a:ln>
+          <a:effectLst>
+            <a:outerShdw sx="100000" sy="100000" kx="0" ky="0" algn="bl" rotWithShape="0" blurRad="101600" dist="38100" dir="8100000">
+              <a:srgbClr val="000000">
+                <a:alpha val="12000"/>
+              </a:srgbClr>
+            </a:outerShdw>
+          </a:effectLst>
+        </p:spPr>
+      </p:sp>
+      <p:sp>
+        <p:nvSpPr>
+          <p:cNvPr id="23" name="Text 21"/>
+          <p:cNvSpPr/>
+          <p:nvPr/>
+        </p:nvSpPr>
+        <p:spPr>
+          <a:xfrm>
+            <a:off x="6519672" y="2258568"/>
+            <a:ext cx="1828800" cy="292608"/>
+          </a:xfrm>
+          <a:prstGeom prst="rect">
+            <a:avLst/>
+          </a:prstGeom>
+          <a:noFill/>
+          <a:ln/>
+        </p:spPr>
+        <p:txBody>
+          <a:bodyPr wrap="square" lIns="0" tIns="0" rIns="0" bIns="0" rtlCol="0" anchor="ctr"/>
+          <a:lstStyle/>
+          <a:p>
+            <a:pPr algn="ctr" indent="0" marL="0">
+              <a:buNone/>
+            </a:pPr>
+            <a:r>
+              <a:rPr lang="en-US" sz="1300" b="1" dirty="0">
+                <a:solidFill>
+                  <a:srgbClr val="9D174D"/>
+                </a:solidFill>
+                <a:latin typeface="Trebuchet MS" pitchFamily="34" charset="0"/>
+                <a:ea typeface="Trebuchet MS" pitchFamily="34" charset="-122"/>
+                <a:cs typeface="Trebuchet MS" pitchFamily="34" charset="-120"/>
+              </a:rPr>
+              <a:t>ness</a:t>
+            </a:r>
+            <a:endParaRPr lang="en-US" sz="1300" dirty="0"/>
+          </a:p>
+        </p:txBody>
+      </p:sp>
+      <p:sp>
+        <p:nvSpPr>
+          <p:cNvPr id="24" name="Text 22"/>
+          <p:cNvSpPr/>
+          <p:nvPr/>
+        </p:nvSpPr>
+        <p:spPr>
+          <a:xfrm>
+            <a:off x="6519672" y="2569464"/>
+            <a:ext cx="1828800" cy="201168"/>
           </a:xfrm>
           <a:prstGeom prst="rect">
             <a:avLst/>
@@ -23826,23 +23870,23 @@
               <a:buNone/>
             </a:pPr>
             <a:r>
-              <a:rPr lang="en-US" sz="700" i="1" dirty="0">
-                <a:solidFill>
-                  <a:srgbClr val="94A3B8"/>
+              <a:rPr lang="en-US" sz="850" dirty="0">
+                <a:solidFill>
+                  <a:srgbClr val="475569"/>
                 </a:solidFill>
                 <a:latin typeface="Calibri" pitchFamily="34" charset="0"/>
                 <a:ea typeface="Calibri" pitchFamily="34" charset="-122"/>
                 <a:cs typeface="Calibri" pitchFamily="34" charset="-120"/>
               </a:rPr>
-              <a:t>'e' dropped before vowel suffix</a:t>
-            </a:r>
-            <a:endParaRPr lang="en-US" sz="700" dirty="0"/>
-          </a:p>
-        </p:txBody>
-      </p:sp>
-      <p:sp>
-        <p:nvSpPr>
-          <p:cNvPr id="23" name="Shape 21"/>
+              <a:t>state or condition of</a:t>
+            </a:r>
+            <a:endParaRPr lang="en-US" sz="850" dirty="0"/>
+          </a:p>
+        </p:txBody>
+      </p:sp>
+      <p:sp>
+        <p:nvSpPr>
+          <p:cNvPr id="25" name="Shape 23"/>
           <p:cNvSpPr/>
           <p:nvPr/>
         </p:nvSpPr>
@@ -23869,7 +23913,7 @@
       </p:sp>
       <p:sp>
         <p:nvSpPr>
-          <p:cNvPr id="24" name="Text 22"/>
+          <p:cNvPr id="26" name="Text 24"/>
           <p:cNvSpPr/>
           <p:nvPr/>
         </p:nvSpPr>
@@ -23908,7 +23952,7 @@
       </p:sp>
       <p:sp>
         <p:nvSpPr>
-          <p:cNvPr id="25" name="Shape 23"/>
+          <p:cNvPr id="27" name="Shape 25"/>
           <p:cNvSpPr/>
           <p:nvPr/>
         </p:nvSpPr>
@@ -23935,7 +23979,7 @@
       </p:sp>
       <p:sp>
         <p:nvSpPr>
-          <p:cNvPr id="26" name="Text 24"/>
+          <p:cNvPr id="28" name="Text 26"/>
           <p:cNvSpPr/>
           <p:nvPr/>
         </p:nvSpPr>
@@ -23974,7 +24018,7 @@
       </p:sp>
       <p:sp>
         <p:nvSpPr>
-          <p:cNvPr id="27" name="Shape 25"/>
+          <p:cNvPr id="29" name="Shape 27"/>
           <p:cNvSpPr/>
           <p:nvPr/>
         </p:nvSpPr>
@@ -24001,7 +24045,7 @@
       </p:sp>
       <p:sp>
         <p:nvSpPr>
-          <p:cNvPr id="28" name="Text 26"/>
+          <p:cNvPr id="30" name="Text 28"/>
           <p:cNvSpPr/>
           <p:nvPr/>
         </p:nvSpPr>
@@ -24040,7 +24084,7 @@
       </p:sp>
       <p:sp>
         <p:nvSpPr>
-          <p:cNvPr id="29" name="Shape 27"/>
+          <p:cNvPr id="31" name="Shape 29"/>
           <p:cNvSpPr/>
           <p:nvPr/>
         </p:nvSpPr>
@@ -24067,7 +24111,7 @@
       </p:sp>
       <p:sp>
         <p:nvSpPr>
-          <p:cNvPr id="30" name="Text 28"/>
+          <p:cNvPr id="32" name="Text 30"/>
           <p:cNvSpPr/>
           <p:nvPr/>
         </p:nvSpPr>
@@ -25248,7 +25292,7 @@
                 <a:ea typeface="Trebuchet MS" pitchFamily="34" charset="-122"/>
                 <a:cs typeface="Trebuchet MS" pitchFamily="34" charset="-120"/>
               </a:rPr>
-              <a:t>waking</a:t>
+              <a:t>wakefulness</a:t>
             </a:r>
             <a:endParaRPr lang="en-US" sz="2800" dirty="0"/>
           </a:p>
@@ -25328,7 +25372,7 @@
         </p:nvSpPr>
         <p:spPr>
           <a:xfrm>
-            <a:off x="2938272" y="2258568"/>
+            <a:off x="2221992" y="2258568"/>
             <a:ext cx="1828800" cy="292608"/>
           </a:xfrm>
           <a:prstGeom prst="rect">
@@ -25362,7 +25406,7 @@
         </p:nvSpPr>
         <p:spPr>
           <a:xfrm>
-            <a:off x="2938272" y="2258568"/>
+            <a:off x="2221992" y="2258568"/>
             <a:ext cx="1828800" cy="292608"/>
           </a:xfrm>
           <a:prstGeom prst="rect">
@@ -25401,7 +25445,7 @@
         </p:nvSpPr>
         <p:spPr>
           <a:xfrm>
-            <a:off x="2938272" y="2569464"/>
+            <a:off x="2221992" y="2569464"/>
             <a:ext cx="1828800" cy="201168"/>
           </a:xfrm>
           <a:prstGeom prst="rect">
@@ -25440,7 +25484,7 @@
         </p:nvSpPr>
         <p:spPr>
           <a:xfrm>
-            <a:off x="5803392" y="2258568"/>
+            <a:off x="4370832" y="2258568"/>
             <a:ext cx="1828800" cy="292608"/>
           </a:xfrm>
           <a:prstGeom prst="rect">
@@ -25474,7 +25518,7 @@
         </p:nvSpPr>
         <p:spPr>
           <a:xfrm>
-            <a:off x="5803392" y="2258568"/>
+            <a:off x="4370832" y="2258568"/>
             <a:ext cx="1828800" cy="292608"/>
           </a:xfrm>
           <a:prstGeom prst="rect">
@@ -25499,7 +25543,7 @@
                 <a:ea typeface="Trebuchet MS" pitchFamily="34" charset="-122"/>
                 <a:cs typeface="Trebuchet MS" pitchFamily="34" charset="-120"/>
               </a:rPr>
-              <a:t>ing</a:t>
+              <a:t>ful</a:t>
             </a:r>
             <a:endParaRPr lang="en-US" sz="1300" dirty="0"/>
           </a:p>
@@ -25513,7 +25557,7 @@
         </p:nvSpPr>
         <p:spPr>
           <a:xfrm>
-            <a:off x="5803392" y="2569464"/>
+            <a:off x="4370832" y="2569464"/>
             <a:ext cx="1828800" cy="201168"/>
           </a:xfrm>
           <a:prstGeom prst="rect">
@@ -25538,7 +25582,7 @@
                 <a:ea typeface="Calibri" pitchFamily="34" charset="-122"/>
                 <a:cs typeface="Calibri" pitchFamily="34" charset="-120"/>
               </a:rPr>
-              <a:t>ongoing action or state</a:t>
+              <a:t>full of, having the quality of</a:t>
             </a:r>
             <a:endParaRPr lang="en-US" sz="850" dirty="0"/>
           </a:p>
@@ -25546,14 +25590,87 @@
       </p:sp>
       <p:sp>
         <p:nvSpPr>
-          <p:cNvPr id="22" name="Text 20"/>
-          <p:cNvSpPr/>
-          <p:nvPr/>
-        </p:nvSpPr>
-        <p:spPr>
-          <a:xfrm>
-            <a:off x="5803392" y="2752344"/>
-            <a:ext cx="1828800" cy="182880"/>
+          <p:cNvPr id="22" name="Shape 20"/>
+          <p:cNvSpPr/>
+          <p:nvPr/>
+        </p:nvSpPr>
+        <p:spPr>
+          <a:xfrm>
+            <a:off x="6519672" y="2258568"/>
+            <a:ext cx="1828800" cy="292608"/>
+          </a:xfrm>
+          <a:prstGeom prst="rect">
+            <a:avLst>
+              <a:gd name="adj" fmla="val 25000"/>
+            </a:avLst>
+          </a:prstGeom>
+          <a:solidFill>
+            <a:srgbClr val="FCE7F3"/>
+          </a:solidFill>
+          <a:ln w="19050">
+            <a:solidFill>
+              <a:srgbClr val="DB2777"/>
+            </a:solidFill>
+            <a:prstDash val="solid"/>
+          </a:ln>
+          <a:effectLst>
+            <a:outerShdw sx="100000" sy="100000" kx="0" ky="0" algn="bl" rotWithShape="0" blurRad="101600" dist="38100" dir="8100000">
+              <a:srgbClr val="000000">
+                <a:alpha val="12000"/>
+              </a:srgbClr>
+            </a:outerShdw>
+          </a:effectLst>
+        </p:spPr>
+      </p:sp>
+      <p:sp>
+        <p:nvSpPr>
+          <p:cNvPr id="23" name="Text 21"/>
+          <p:cNvSpPr/>
+          <p:nvPr/>
+        </p:nvSpPr>
+        <p:spPr>
+          <a:xfrm>
+            <a:off x="6519672" y="2258568"/>
+            <a:ext cx="1828800" cy="292608"/>
+          </a:xfrm>
+          <a:prstGeom prst="rect">
+            <a:avLst/>
+          </a:prstGeom>
+          <a:noFill/>
+          <a:ln/>
+        </p:spPr>
+        <p:txBody>
+          <a:bodyPr wrap="square" lIns="0" tIns="0" rIns="0" bIns="0" rtlCol="0" anchor="ctr"/>
+          <a:lstStyle/>
+          <a:p>
+            <a:pPr algn="ctr" indent="0" marL="0">
+              <a:buNone/>
+            </a:pPr>
+            <a:r>
+              <a:rPr lang="en-US" sz="1300" b="1" dirty="0">
+                <a:solidFill>
+                  <a:srgbClr val="9D174D"/>
+                </a:solidFill>
+                <a:latin typeface="Trebuchet MS" pitchFamily="34" charset="0"/>
+                <a:ea typeface="Trebuchet MS" pitchFamily="34" charset="-122"/>
+                <a:cs typeface="Trebuchet MS" pitchFamily="34" charset="-120"/>
+              </a:rPr>
+              <a:t>ness</a:t>
+            </a:r>
+            <a:endParaRPr lang="en-US" sz="1300" dirty="0"/>
+          </a:p>
+        </p:txBody>
+      </p:sp>
+      <p:sp>
+        <p:nvSpPr>
+          <p:cNvPr id="24" name="Text 22"/>
+          <p:cNvSpPr/>
+          <p:nvPr/>
+        </p:nvSpPr>
+        <p:spPr>
+          <a:xfrm>
+            <a:off x="6519672" y="2569464"/>
+            <a:ext cx="1828800" cy="201168"/>
           </a:xfrm>
           <a:prstGeom prst="rect">
             <a:avLst/>
@@ -25569,23 +25686,23 @@
               <a:buNone/>
             </a:pPr>
             <a:r>
-              <a:rPr lang="en-US" sz="700" i="1" dirty="0">
-                <a:solidFill>
-                  <a:srgbClr val="94A3B8"/>
+              <a:rPr lang="en-US" sz="850" dirty="0">
+                <a:solidFill>
+                  <a:srgbClr val="475569"/>
                 </a:solidFill>
                 <a:latin typeface="Calibri" pitchFamily="34" charset="0"/>
                 <a:ea typeface="Calibri" pitchFamily="34" charset="-122"/>
                 <a:cs typeface="Calibri" pitchFamily="34" charset="-120"/>
               </a:rPr>
-              <a:t>'e' dropped before vowel suffix</a:t>
-            </a:r>
-            <a:endParaRPr lang="en-US" sz="700" dirty="0"/>
-          </a:p>
-        </p:txBody>
-      </p:sp>
-      <p:sp>
-        <p:nvSpPr>
-          <p:cNvPr id="23" name="Shape 21"/>
+              <a:t>state or condition of</a:t>
+            </a:r>
+            <a:endParaRPr lang="en-US" sz="850" dirty="0"/>
+          </a:p>
+        </p:txBody>
+      </p:sp>
+      <p:sp>
+        <p:nvSpPr>
+          <p:cNvPr id="25" name="Shape 23"/>
           <p:cNvSpPr/>
           <p:nvPr/>
         </p:nvSpPr>
@@ -25612,7 +25729,7 @@
       </p:sp>
       <p:sp>
         <p:nvSpPr>
-          <p:cNvPr id="24" name="Text 22"/>
+          <p:cNvPr id="26" name="Text 24"/>
           <p:cNvSpPr/>
           <p:nvPr/>
         </p:nvSpPr>
@@ -25651,7 +25768,7 @@
       </p:sp>
       <p:sp>
         <p:nvSpPr>
-          <p:cNvPr id="25" name="Shape 23"/>
+          <p:cNvPr id="27" name="Shape 25"/>
           <p:cNvSpPr/>
           <p:nvPr/>
         </p:nvSpPr>
@@ -25678,13 +25795,13 @@
       </p:sp>
       <p:sp>
         <p:nvSpPr>
-          <p:cNvPr id="26" name="Shape 24"/>
-          <p:cNvSpPr/>
-          <p:nvPr/>
-        </p:nvSpPr>
-        <p:spPr>
-          <a:xfrm>
-            <a:off x="2999232" y="3364992"/>
+          <p:cNvPr id="28" name="Shape 26"/>
+          <p:cNvSpPr/>
+          <p:nvPr/>
+        </p:nvSpPr>
+        <p:spPr>
+          <a:xfrm>
+            <a:off x="2313432" y="3364992"/>
             <a:ext cx="1645920" cy="475488"/>
           </a:xfrm>
           <a:prstGeom prst="rect">
@@ -25705,13 +25822,13 @@
       </p:sp>
       <p:sp>
         <p:nvSpPr>
-          <p:cNvPr id="27" name="Text 25"/>
-          <p:cNvSpPr/>
-          <p:nvPr/>
-        </p:nvSpPr>
-        <p:spPr>
-          <a:xfrm>
-            <a:off x="2999232" y="3364992"/>
+          <p:cNvPr id="29" name="Text 27"/>
+          <p:cNvSpPr/>
+          <p:nvPr/>
+        </p:nvSpPr>
+        <p:spPr>
+          <a:xfrm>
+            <a:off x="2313432" y="3364992"/>
             <a:ext cx="1645920" cy="475488"/>
           </a:xfrm>
           <a:prstGeom prst="rect">
@@ -25736,7 +25853,7 @@
                 <a:ea typeface="Trebuchet MS" pitchFamily="34" charset="-122"/>
                 <a:cs typeface="Trebuchet MS" pitchFamily="34" charset="-120"/>
               </a:rPr>
-              <a:t>wa</a:t>
+              <a:t>wake</a:t>
             </a:r>
             <a:endParaRPr lang="en-US" sz="1400" dirty="0"/>
           </a:p>
@@ -25744,14 +25861,14 @@
       </p:sp>
       <p:sp>
         <p:nvSpPr>
-          <p:cNvPr id="28" name="Text 26"/>
-          <p:cNvSpPr/>
-          <p:nvPr/>
-        </p:nvSpPr>
-        <p:spPr>
-          <a:xfrm>
-            <a:off x="4645152" y="3364992"/>
-            <a:ext cx="1097280" cy="475488"/>
+          <p:cNvPr id="30" name="Text 28"/>
+          <p:cNvSpPr/>
+          <p:nvPr/>
+        </p:nvSpPr>
+        <p:spPr>
+          <a:xfrm>
+            <a:off x="3959352" y="3364992"/>
+            <a:ext cx="411480" cy="475488"/>
           </a:xfrm>
           <a:prstGeom prst="rect">
             <a:avLst/>
@@ -25783,13 +25900,13 @@
       </p:sp>
       <p:sp>
         <p:nvSpPr>
-          <p:cNvPr id="29" name="Shape 27"/>
-          <p:cNvSpPr/>
-          <p:nvPr/>
-        </p:nvSpPr>
-        <p:spPr>
-          <a:xfrm>
-            <a:off x="5742432" y="3364992"/>
+          <p:cNvPr id="31" name="Shape 29"/>
+          <p:cNvSpPr/>
+          <p:nvPr/>
+        </p:nvSpPr>
+        <p:spPr>
+          <a:xfrm>
+            <a:off x="4370832" y="3364992"/>
             <a:ext cx="1645920" cy="475488"/>
           </a:xfrm>
           <a:prstGeom prst="rect">
@@ -25810,13 +25927,13 @@
       </p:sp>
       <p:sp>
         <p:nvSpPr>
-          <p:cNvPr id="30" name="Text 28"/>
-          <p:cNvSpPr/>
-          <p:nvPr/>
-        </p:nvSpPr>
-        <p:spPr>
-          <a:xfrm>
-            <a:off x="5742432" y="3364992"/>
+          <p:cNvPr id="32" name="Text 30"/>
+          <p:cNvSpPr/>
+          <p:nvPr/>
+        </p:nvSpPr>
+        <p:spPr>
+          <a:xfrm>
+            <a:off x="4370832" y="3364992"/>
             <a:ext cx="1645920" cy="475488"/>
           </a:xfrm>
           <a:prstGeom prst="rect">
@@ -25841,7 +25958,7 @@
                 <a:ea typeface="Trebuchet MS" pitchFamily="34" charset="-122"/>
                 <a:cs typeface="Trebuchet MS" pitchFamily="34" charset="-120"/>
               </a:rPr>
-              <a:t>king</a:t>
+              <a:t>ful</a:t>
             </a:r>
             <a:endParaRPr lang="en-US" sz="1400" dirty="0"/>
           </a:p>
@@ -25849,7 +25966,112 @@
       </p:sp>
       <p:sp>
         <p:nvSpPr>
-          <p:cNvPr id="31" name="Shape 29"/>
+          <p:cNvPr id="33" name="Text 31"/>
+          <p:cNvSpPr/>
+          <p:nvPr/>
+        </p:nvSpPr>
+        <p:spPr>
+          <a:xfrm>
+            <a:off x="6016752" y="3364992"/>
+            <a:ext cx="411480" cy="475488"/>
+          </a:xfrm>
+          <a:prstGeom prst="rect">
+            <a:avLst/>
+          </a:prstGeom>
+          <a:noFill/>
+          <a:ln/>
+        </p:spPr>
+        <p:txBody>
+          <a:bodyPr wrap="square" lIns="0" tIns="0" rIns="0" bIns="0" rtlCol="0" anchor="ctr"/>
+          <a:lstStyle/>
+          <a:p>
+            <a:pPr algn="ctr" indent="0" marL="0">
+              <a:buNone/>
+            </a:pPr>
+            <a:r>
+              <a:rPr lang="en-US" sz="1600" b="1" dirty="0">
+                <a:solidFill>
+                  <a:srgbClr val="0D9488"/>
+                </a:solidFill>
+                <a:latin typeface="Trebuchet MS" pitchFamily="34" charset="0"/>
+                <a:ea typeface="Trebuchet MS" pitchFamily="34" charset="-122"/>
+                <a:cs typeface="Trebuchet MS" pitchFamily="34" charset="-120"/>
+              </a:rPr>
+              <a:t>·</a:t>
+            </a:r>
+            <a:endParaRPr lang="en-US" sz="1600" dirty="0"/>
+          </a:p>
+        </p:txBody>
+      </p:sp>
+      <p:sp>
+        <p:nvSpPr>
+          <p:cNvPr id="34" name="Shape 32"/>
+          <p:cNvSpPr/>
+          <p:nvPr/>
+        </p:nvSpPr>
+        <p:spPr>
+          <a:xfrm>
+            <a:off x="6428232" y="3364992"/>
+            <a:ext cx="1645920" cy="475488"/>
+          </a:xfrm>
+          <a:prstGeom prst="rect">
+            <a:avLst>
+              <a:gd name="adj" fmla="val 9615"/>
+            </a:avLst>
+          </a:prstGeom>
+          <a:solidFill>
+            <a:srgbClr val="FFFFFF"/>
+          </a:solidFill>
+          <a:ln w="12700">
+            <a:solidFill>
+              <a:srgbClr val="0D9488"/>
+            </a:solidFill>
+            <a:prstDash val="solid"/>
+          </a:ln>
+        </p:spPr>
+      </p:sp>
+      <p:sp>
+        <p:nvSpPr>
+          <p:cNvPr id="35" name="Text 33"/>
+          <p:cNvSpPr/>
+          <p:nvPr/>
+        </p:nvSpPr>
+        <p:spPr>
+          <a:xfrm>
+            <a:off x="6428232" y="3364992"/>
+            <a:ext cx="1645920" cy="475488"/>
+          </a:xfrm>
+          <a:prstGeom prst="rect">
+            <a:avLst/>
+          </a:prstGeom>
+          <a:noFill/>
+          <a:ln/>
+        </p:spPr>
+        <p:txBody>
+          <a:bodyPr wrap="square" lIns="0" tIns="0" rIns="0" bIns="0" rtlCol="0" anchor="ctr"/>
+          <a:lstStyle/>
+          <a:p>
+            <a:pPr algn="ctr" indent="0" marL="0">
+              <a:buNone/>
+            </a:pPr>
+            <a:r>
+              <a:rPr lang="en-US" sz="1400" b="1" dirty="0">
+                <a:solidFill>
+                  <a:srgbClr val="0D9488"/>
+                </a:solidFill>
+                <a:latin typeface="Trebuchet MS" pitchFamily="34" charset="0"/>
+                <a:ea typeface="Trebuchet MS" pitchFamily="34" charset="-122"/>
+                <a:cs typeface="Trebuchet MS" pitchFamily="34" charset="-120"/>
+              </a:rPr>
+              <a:t>ness</a:t>
+            </a:r>
+            <a:endParaRPr lang="en-US" sz="1400" dirty="0"/>
+          </a:p>
+        </p:txBody>
+      </p:sp>
+      <p:sp>
+        <p:nvSpPr>
+          <p:cNvPr id="36" name="Shape 34"/>
           <p:cNvSpPr/>
           <p:nvPr/>
         </p:nvSpPr>
@@ -25876,7 +26098,7 @@
       </p:sp>
       <p:sp>
         <p:nvSpPr>
-          <p:cNvPr id="32" name="Text 30"/>
+          <p:cNvPr id="37" name="Text 35"/>
           <p:cNvSpPr/>
           <p:nvPr/>
         </p:nvSpPr>
@@ -25915,7 +26137,7 @@
       </p:sp>
       <p:sp>
         <p:nvSpPr>
-          <p:cNvPr id="33" name="Shape 31"/>
+          <p:cNvPr id="38" name="Shape 36"/>
           <p:cNvSpPr/>
           <p:nvPr/>
         </p:nvSpPr>
@@ -25942,7 +26164,7 @@
       </p:sp>
       <p:sp>
         <p:nvSpPr>
-          <p:cNvPr id="34" name="Text 32"/>
+          <p:cNvPr id="39" name="Text 37"/>
           <p:cNvSpPr/>
           <p:nvPr/>
         </p:nvSpPr>
@@ -26404,7 +26626,7 @@
                 <a:ea typeface="Trebuchet MS" pitchFamily="34" charset="-122"/>
                 <a:cs typeface="Trebuchet MS" pitchFamily="34" charset="-120"/>
               </a:rPr>
-              <a:t>waking</a:t>
+              <a:t>wakefulness</a:t>
             </a:r>
             <a:endParaRPr lang="en-US" sz="2800" dirty="0"/>
           </a:p>
@@ -26484,7 +26706,7 @@
         </p:nvSpPr>
         <p:spPr>
           <a:xfrm>
-            <a:off x="2938272" y="2258568"/>
+            <a:off x="2221992" y="2258568"/>
             <a:ext cx="1828800" cy="292608"/>
           </a:xfrm>
           <a:prstGeom prst="rect">
@@ -26518,7 +26740,7 @@
         </p:nvSpPr>
         <p:spPr>
           <a:xfrm>
-            <a:off x="2938272" y="2258568"/>
+            <a:off x="2221992" y="2258568"/>
             <a:ext cx="1828800" cy="292608"/>
           </a:xfrm>
           <a:prstGeom prst="rect">
@@ -26557,7 +26779,7 @@
         </p:nvSpPr>
         <p:spPr>
           <a:xfrm>
-            <a:off x="2938272" y="2569464"/>
+            <a:off x="2221992" y="2569464"/>
             <a:ext cx="1828800" cy="201168"/>
           </a:xfrm>
           <a:prstGeom prst="rect">
@@ -26596,7 +26818,7 @@
         </p:nvSpPr>
         <p:spPr>
           <a:xfrm>
-            <a:off x="5803392" y="2258568"/>
+            <a:off x="4370832" y="2258568"/>
             <a:ext cx="1828800" cy="292608"/>
           </a:xfrm>
           <a:prstGeom prst="rect">
@@ -26630,7 +26852,7 @@
         </p:nvSpPr>
         <p:spPr>
           <a:xfrm>
-            <a:off x="5803392" y="2258568"/>
+            <a:off x="4370832" y="2258568"/>
             <a:ext cx="1828800" cy="292608"/>
           </a:xfrm>
           <a:prstGeom prst="rect">
@@ -26655,7 +26877,7 @@
                 <a:ea typeface="Trebuchet MS" pitchFamily="34" charset="-122"/>
                 <a:cs typeface="Trebuchet MS" pitchFamily="34" charset="-120"/>
               </a:rPr>
-              <a:t>ing</a:t>
+              <a:t>ful</a:t>
             </a:r>
             <a:endParaRPr lang="en-US" sz="1300" dirty="0"/>
           </a:p>
@@ -26669,7 +26891,7 @@
         </p:nvSpPr>
         <p:spPr>
           <a:xfrm>
-            <a:off x="5803392" y="2569464"/>
+            <a:off x="4370832" y="2569464"/>
             <a:ext cx="1828800" cy="201168"/>
           </a:xfrm>
           <a:prstGeom prst="rect">
@@ -26694,7 +26916,7 @@
                 <a:ea typeface="Calibri" pitchFamily="34" charset="-122"/>
                 <a:cs typeface="Calibri" pitchFamily="34" charset="-120"/>
               </a:rPr>
-              <a:t>ongoing action or state</a:t>
+              <a:t>full of, having the quality of</a:t>
             </a:r>
             <a:endParaRPr lang="en-US" sz="850" dirty="0"/>
           </a:p>
@@ -26702,14 +26924,87 @@
       </p:sp>
       <p:sp>
         <p:nvSpPr>
-          <p:cNvPr id="22" name="Text 20"/>
-          <p:cNvSpPr/>
-          <p:nvPr/>
-        </p:nvSpPr>
-        <p:spPr>
-          <a:xfrm>
-            <a:off x="5803392" y="2752344"/>
-            <a:ext cx="1828800" cy="182880"/>
+          <p:cNvPr id="22" name="Shape 20"/>
+          <p:cNvSpPr/>
+          <p:nvPr/>
+        </p:nvSpPr>
+        <p:spPr>
+          <a:xfrm>
+            <a:off x="6519672" y="2258568"/>
+            <a:ext cx="1828800" cy="292608"/>
+          </a:xfrm>
+          <a:prstGeom prst="rect">
+            <a:avLst>
+              <a:gd name="adj" fmla="val 25000"/>
+            </a:avLst>
+          </a:prstGeom>
+          <a:solidFill>
+            <a:srgbClr val="FCE7F3"/>
+          </a:solidFill>
+          <a:ln w="19050">
+            <a:solidFill>
+              <a:srgbClr val="DB2777"/>
+            </a:solidFill>
+            <a:prstDash val="solid"/>
+          </a:ln>
+          <a:effectLst>
+            <a:outerShdw sx="100000" sy="100000" kx="0" ky="0" algn="bl" rotWithShape="0" blurRad="101600" dist="38100" dir="8100000">
+              <a:srgbClr val="000000">
+                <a:alpha val="12000"/>
+              </a:srgbClr>
+            </a:outerShdw>
+          </a:effectLst>
+        </p:spPr>
+      </p:sp>
+      <p:sp>
+        <p:nvSpPr>
+          <p:cNvPr id="23" name="Text 21"/>
+          <p:cNvSpPr/>
+          <p:nvPr/>
+        </p:nvSpPr>
+        <p:spPr>
+          <a:xfrm>
+            <a:off x="6519672" y="2258568"/>
+            <a:ext cx="1828800" cy="292608"/>
+          </a:xfrm>
+          <a:prstGeom prst="rect">
+            <a:avLst/>
+          </a:prstGeom>
+          <a:noFill/>
+          <a:ln/>
+        </p:spPr>
+        <p:txBody>
+          <a:bodyPr wrap="square" lIns="0" tIns="0" rIns="0" bIns="0" rtlCol="0" anchor="ctr"/>
+          <a:lstStyle/>
+          <a:p>
+            <a:pPr algn="ctr" indent="0" marL="0">
+              <a:buNone/>
+            </a:pPr>
+            <a:r>
+              <a:rPr lang="en-US" sz="1300" b="1" dirty="0">
+                <a:solidFill>
+                  <a:srgbClr val="9D174D"/>
+                </a:solidFill>
+                <a:latin typeface="Trebuchet MS" pitchFamily="34" charset="0"/>
+                <a:ea typeface="Trebuchet MS" pitchFamily="34" charset="-122"/>
+                <a:cs typeface="Trebuchet MS" pitchFamily="34" charset="-120"/>
+              </a:rPr>
+              <a:t>ness</a:t>
+            </a:r>
+            <a:endParaRPr lang="en-US" sz="1300" dirty="0"/>
+          </a:p>
+        </p:txBody>
+      </p:sp>
+      <p:sp>
+        <p:nvSpPr>
+          <p:cNvPr id="24" name="Text 22"/>
+          <p:cNvSpPr/>
+          <p:nvPr/>
+        </p:nvSpPr>
+        <p:spPr>
+          <a:xfrm>
+            <a:off x="6519672" y="2569464"/>
+            <a:ext cx="1828800" cy="201168"/>
           </a:xfrm>
           <a:prstGeom prst="rect">
             <a:avLst/>
@@ -26725,23 +27020,23 @@
               <a:buNone/>
             </a:pPr>
             <a:r>
-              <a:rPr lang="en-US" sz="700" i="1" dirty="0">
-                <a:solidFill>
-                  <a:srgbClr val="94A3B8"/>
+              <a:rPr lang="en-US" sz="850" dirty="0">
+                <a:solidFill>
+                  <a:srgbClr val="475569"/>
                 </a:solidFill>
                 <a:latin typeface="Calibri" pitchFamily="34" charset="0"/>
                 <a:ea typeface="Calibri" pitchFamily="34" charset="-122"/>
                 <a:cs typeface="Calibri" pitchFamily="34" charset="-120"/>
               </a:rPr>
-              <a:t>'e' dropped before vowel suffix</a:t>
-            </a:r>
-            <a:endParaRPr lang="en-US" sz="700" dirty="0"/>
-          </a:p>
-        </p:txBody>
-      </p:sp>
-      <p:sp>
-        <p:nvSpPr>
-          <p:cNvPr id="23" name="Shape 21"/>
+              <a:t>state or condition of</a:t>
+            </a:r>
+            <a:endParaRPr lang="en-US" sz="850" dirty="0"/>
+          </a:p>
+        </p:txBody>
+      </p:sp>
+      <p:sp>
+        <p:nvSpPr>
+          <p:cNvPr id="25" name="Shape 23"/>
           <p:cNvSpPr/>
           <p:nvPr/>
         </p:nvSpPr>
@@ -26768,7 +27063,7 @@
       </p:sp>
       <p:sp>
         <p:nvSpPr>
-          <p:cNvPr id="24" name="Text 22"/>
+          <p:cNvPr id="26" name="Text 24"/>
           <p:cNvSpPr/>
           <p:nvPr/>
         </p:nvSpPr>
@@ -26807,7 +27102,7 @@
       </p:sp>
       <p:sp>
         <p:nvSpPr>
-          <p:cNvPr id="25" name="Shape 23"/>
+          <p:cNvPr id="27" name="Shape 25"/>
           <p:cNvSpPr/>
           <p:nvPr/>
         </p:nvSpPr>
@@ -26834,13 +27129,13 @@
       </p:sp>
       <p:sp>
         <p:nvSpPr>
-          <p:cNvPr id="26" name="Shape 24"/>
-          <p:cNvSpPr/>
-          <p:nvPr/>
-        </p:nvSpPr>
-        <p:spPr>
-          <a:xfrm>
-            <a:off x="2999232" y="3364992"/>
+          <p:cNvPr id="28" name="Shape 26"/>
+          <p:cNvSpPr/>
+          <p:nvPr/>
+        </p:nvSpPr>
+        <p:spPr>
+          <a:xfrm>
+            <a:off x="2313432" y="3364992"/>
             <a:ext cx="1645920" cy="475488"/>
           </a:xfrm>
           <a:prstGeom prst="rect">
@@ -26861,13 +27156,13 @@
       </p:sp>
       <p:sp>
         <p:nvSpPr>
-          <p:cNvPr id="27" name="Text 25"/>
-          <p:cNvSpPr/>
-          <p:nvPr/>
-        </p:nvSpPr>
-        <p:spPr>
-          <a:xfrm>
-            <a:off x="2999232" y="3364992"/>
+          <p:cNvPr id="29" name="Text 27"/>
+          <p:cNvSpPr/>
+          <p:nvPr/>
+        </p:nvSpPr>
+        <p:spPr>
+          <a:xfrm>
+            <a:off x="2313432" y="3364992"/>
             <a:ext cx="1645920" cy="475488"/>
           </a:xfrm>
           <a:prstGeom prst="rect">
@@ -26892,7 +27187,7 @@
                 <a:ea typeface="Trebuchet MS" pitchFamily="34" charset="-122"/>
                 <a:cs typeface="Trebuchet MS" pitchFamily="34" charset="-120"/>
               </a:rPr>
-              <a:t>wa</a:t>
+              <a:t>wake</a:t>
             </a:r>
             <a:endParaRPr lang="en-US" sz="1400" dirty="0"/>
           </a:p>
@@ -26900,14 +27195,14 @@
       </p:sp>
       <p:sp>
         <p:nvSpPr>
-          <p:cNvPr id="28" name="Text 26"/>
-          <p:cNvSpPr/>
-          <p:nvPr/>
-        </p:nvSpPr>
-        <p:spPr>
-          <a:xfrm>
-            <a:off x="4645152" y="3364992"/>
-            <a:ext cx="1097280" cy="475488"/>
+          <p:cNvPr id="30" name="Text 28"/>
+          <p:cNvSpPr/>
+          <p:nvPr/>
+        </p:nvSpPr>
+        <p:spPr>
+          <a:xfrm>
+            <a:off x="3959352" y="3364992"/>
+            <a:ext cx="411480" cy="475488"/>
           </a:xfrm>
           <a:prstGeom prst="rect">
             <a:avLst/>
@@ -26939,13 +27234,13 @@
       </p:sp>
       <p:sp>
         <p:nvSpPr>
-          <p:cNvPr id="29" name="Shape 27"/>
-          <p:cNvSpPr/>
-          <p:nvPr/>
-        </p:nvSpPr>
-        <p:spPr>
-          <a:xfrm>
-            <a:off x="5742432" y="3364992"/>
+          <p:cNvPr id="31" name="Shape 29"/>
+          <p:cNvSpPr/>
+          <p:nvPr/>
+        </p:nvSpPr>
+        <p:spPr>
+          <a:xfrm>
+            <a:off x="4370832" y="3364992"/>
             <a:ext cx="1645920" cy="475488"/>
           </a:xfrm>
           <a:prstGeom prst="rect">
@@ -26966,13 +27261,13 @@
       </p:sp>
       <p:sp>
         <p:nvSpPr>
-          <p:cNvPr id="30" name="Text 28"/>
-          <p:cNvSpPr/>
-          <p:nvPr/>
-        </p:nvSpPr>
-        <p:spPr>
-          <a:xfrm>
-            <a:off x="5742432" y="3364992"/>
+          <p:cNvPr id="32" name="Text 30"/>
+          <p:cNvSpPr/>
+          <p:nvPr/>
+        </p:nvSpPr>
+        <p:spPr>
+          <a:xfrm>
+            <a:off x="4370832" y="3364992"/>
             <a:ext cx="1645920" cy="475488"/>
           </a:xfrm>
           <a:prstGeom prst="rect">
@@ -26997,7 +27292,7 @@
                 <a:ea typeface="Trebuchet MS" pitchFamily="34" charset="-122"/>
                 <a:cs typeface="Trebuchet MS" pitchFamily="34" charset="-120"/>
               </a:rPr>
-              <a:t>king</a:t>
+              <a:t>ful</a:t>
             </a:r>
             <a:endParaRPr lang="en-US" sz="1400" dirty="0"/>
           </a:p>
@@ -27005,7 +27300,112 @@
       </p:sp>
       <p:sp>
         <p:nvSpPr>
-          <p:cNvPr id="31" name="Shape 29"/>
+          <p:cNvPr id="33" name="Text 31"/>
+          <p:cNvSpPr/>
+          <p:nvPr/>
+        </p:nvSpPr>
+        <p:spPr>
+          <a:xfrm>
+            <a:off x="6016752" y="3364992"/>
+            <a:ext cx="411480" cy="475488"/>
+          </a:xfrm>
+          <a:prstGeom prst="rect">
+            <a:avLst/>
+          </a:prstGeom>
+          <a:noFill/>
+          <a:ln/>
+        </p:spPr>
+        <p:txBody>
+          <a:bodyPr wrap="square" lIns="0" tIns="0" rIns="0" bIns="0" rtlCol="0" anchor="ctr"/>
+          <a:lstStyle/>
+          <a:p>
+            <a:pPr algn="ctr" indent="0" marL="0">
+              <a:buNone/>
+            </a:pPr>
+            <a:r>
+              <a:rPr lang="en-US" sz="1600" b="1" dirty="0">
+                <a:solidFill>
+                  <a:srgbClr val="0D9488"/>
+                </a:solidFill>
+                <a:latin typeface="Trebuchet MS" pitchFamily="34" charset="0"/>
+                <a:ea typeface="Trebuchet MS" pitchFamily="34" charset="-122"/>
+                <a:cs typeface="Trebuchet MS" pitchFamily="34" charset="-120"/>
+              </a:rPr>
+              <a:t>·</a:t>
+            </a:r>
+            <a:endParaRPr lang="en-US" sz="1600" dirty="0"/>
+          </a:p>
+        </p:txBody>
+      </p:sp>
+      <p:sp>
+        <p:nvSpPr>
+          <p:cNvPr id="34" name="Shape 32"/>
+          <p:cNvSpPr/>
+          <p:nvPr/>
+        </p:nvSpPr>
+        <p:spPr>
+          <a:xfrm>
+            <a:off x="6428232" y="3364992"/>
+            <a:ext cx="1645920" cy="475488"/>
+          </a:xfrm>
+          <a:prstGeom prst="rect">
+            <a:avLst>
+              <a:gd name="adj" fmla="val 9615"/>
+            </a:avLst>
+          </a:prstGeom>
+          <a:solidFill>
+            <a:srgbClr val="FFFFFF"/>
+          </a:solidFill>
+          <a:ln w="12700">
+            <a:solidFill>
+              <a:srgbClr val="0D9488"/>
+            </a:solidFill>
+            <a:prstDash val="solid"/>
+          </a:ln>
+        </p:spPr>
+      </p:sp>
+      <p:sp>
+        <p:nvSpPr>
+          <p:cNvPr id="35" name="Text 33"/>
+          <p:cNvSpPr/>
+          <p:nvPr/>
+        </p:nvSpPr>
+        <p:spPr>
+          <a:xfrm>
+            <a:off x="6428232" y="3364992"/>
+            <a:ext cx="1645920" cy="475488"/>
+          </a:xfrm>
+          <a:prstGeom prst="rect">
+            <a:avLst/>
+          </a:prstGeom>
+          <a:noFill/>
+          <a:ln/>
+        </p:spPr>
+        <p:txBody>
+          <a:bodyPr wrap="square" lIns="0" tIns="0" rIns="0" bIns="0" rtlCol="0" anchor="ctr"/>
+          <a:lstStyle/>
+          <a:p>
+            <a:pPr algn="ctr" indent="0" marL="0">
+              <a:buNone/>
+            </a:pPr>
+            <a:r>
+              <a:rPr lang="en-US" sz="1400" b="1" dirty="0">
+                <a:solidFill>
+                  <a:srgbClr val="0D9488"/>
+                </a:solidFill>
+                <a:latin typeface="Trebuchet MS" pitchFamily="34" charset="0"/>
+                <a:ea typeface="Trebuchet MS" pitchFamily="34" charset="-122"/>
+                <a:cs typeface="Trebuchet MS" pitchFamily="34" charset="-120"/>
+              </a:rPr>
+              <a:t>ness</a:t>
+            </a:r>
+            <a:endParaRPr lang="en-US" sz="1400" dirty="0"/>
+          </a:p>
+        </p:txBody>
+      </p:sp>
+      <p:sp>
+        <p:nvSpPr>
+          <p:cNvPr id="36" name="Shape 34"/>
           <p:cNvSpPr/>
           <p:nvPr/>
         </p:nvSpPr>
@@ -27032,7 +27432,7 @@
       </p:sp>
       <p:sp>
         <p:nvSpPr>
-          <p:cNvPr id="32" name="Text 30"/>
+          <p:cNvPr id="37" name="Text 35"/>
           <p:cNvSpPr/>
           <p:nvPr/>
         </p:nvSpPr>
@@ -27071,7 +27471,7 @@
       </p:sp>
       <p:sp>
         <p:nvSpPr>
-          <p:cNvPr id="33" name="Shape 31"/>
+          <p:cNvPr id="38" name="Shape 36"/>
           <p:cNvSpPr/>
           <p:nvPr/>
         </p:nvSpPr>
@@ -27098,14 +27498,14 @@
       </p:sp>
       <p:sp>
         <p:nvSpPr>
-          <p:cNvPr id="34" name="Shape 32"/>
-          <p:cNvSpPr/>
-          <p:nvPr/>
-        </p:nvSpPr>
-        <p:spPr>
-          <a:xfrm>
-            <a:off x="2670048" y="4169664"/>
-            <a:ext cx="685800" cy="475488"/>
+          <p:cNvPr id="39" name="Shape 37"/>
+          <p:cNvSpPr/>
+          <p:nvPr/>
+        </p:nvSpPr>
+        <p:spPr>
+          <a:xfrm>
+            <a:off x="1951330" y="4169664"/>
+            <a:ext cx="676656" cy="475488"/>
           </a:xfrm>
           <a:prstGeom prst="rect">
             <a:avLst>
@@ -27125,14 +27525,14 @@
       </p:sp>
       <p:sp>
         <p:nvSpPr>
-          <p:cNvPr id="35" name="Text 33"/>
-          <p:cNvSpPr/>
-          <p:nvPr/>
-        </p:nvSpPr>
-        <p:spPr>
-          <a:xfrm>
-            <a:off x="2670048" y="4169664"/>
-            <a:ext cx="685800" cy="475488"/>
+          <p:cNvPr id="40" name="Text 38"/>
+          <p:cNvSpPr/>
+          <p:nvPr/>
+        </p:nvSpPr>
+        <p:spPr>
+          <a:xfrm>
+            <a:off x="1951330" y="4169664"/>
+            <a:ext cx="676656" cy="475488"/>
           </a:xfrm>
           <a:prstGeom prst="rect">
             <a:avLst/>
@@ -27164,14 +27564,14 @@
       </p:sp>
       <p:sp>
         <p:nvSpPr>
-          <p:cNvPr id="36" name="Shape 34"/>
-          <p:cNvSpPr/>
-          <p:nvPr/>
-        </p:nvSpPr>
-        <p:spPr>
-          <a:xfrm>
-            <a:off x="4123944" y="4169664"/>
-            <a:ext cx="685800" cy="475488"/>
+          <p:cNvPr id="41" name="Shape 39"/>
+          <p:cNvSpPr/>
+          <p:nvPr/>
+        </p:nvSpPr>
+        <p:spPr>
+          <a:xfrm>
+            <a:off x="2677363" y="4169664"/>
+            <a:ext cx="676656" cy="475488"/>
           </a:xfrm>
           <a:prstGeom prst="rect">
             <a:avLst>
@@ -27191,14 +27591,14 @@
       </p:sp>
       <p:sp>
         <p:nvSpPr>
-          <p:cNvPr id="37" name="Text 35"/>
-          <p:cNvSpPr/>
-          <p:nvPr/>
-        </p:nvSpPr>
-        <p:spPr>
-          <a:xfrm>
-            <a:off x="4123944" y="4169664"/>
-            <a:ext cx="685800" cy="475488"/>
+          <p:cNvPr id="42" name="Text 40"/>
+          <p:cNvSpPr/>
+          <p:nvPr/>
+        </p:nvSpPr>
+        <p:spPr>
+          <a:xfrm>
+            <a:off x="2677363" y="4169664"/>
+            <a:ext cx="676656" cy="475488"/>
           </a:xfrm>
           <a:prstGeom prst="rect">
             <a:avLst/>
@@ -27230,14 +27630,14 @@
       </p:sp>
       <p:sp>
         <p:nvSpPr>
-          <p:cNvPr id="38" name="Shape 36"/>
-          <p:cNvSpPr/>
-          <p:nvPr/>
-        </p:nvSpPr>
-        <p:spPr>
-          <a:xfrm>
-            <a:off x="5577840" y="4169664"/>
-            <a:ext cx="685800" cy="475488"/>
+          <p:cNvPr id="43" name="Shape 41"/>
+          <p:cNvSpPr/>
+          <p:nvPr/>
+        </p:nvSpPr>
+        <p:spPr>
+          <a:xfrm>
+            <a:off x="3403397" y="4169664"/>
+            <a:ext cx="676656" cy="475488"/>
           </a:xfrm>
           <a:prstGeom prst="rect">
             <a:avLst>
@@ -27257,14 +27657,14 @@
       </p:sp>
       <p:sp>
         <p:nvSpPr>
-          <p:cNvPr id="39" name="Text 37"/>
-          <p:cNvSpPr/>
-          <p:nvPr/>
-        </p:nvSpPr>
-        <p:spPr>
-          <a:xfrm>
-            <a:off x="5577840" y="4169664"/>
-            <a:ext cx="685800" cy="475488"/>
+          <p:cNvPr id="44" name="Text 42"/>
+          <p:cNvSpPr/>
+          <p:nvPr/>
+        </p:nvSpPr>
+        <p:spPr>
+          <a:xfrm>
+            <a:off x="3403397" y="4169664"/>
+            <a:ext cx="676656" cy="475488"/>
           </a:xfrm>
           <a:prstGeom prst="rect">
             <a:avLst/>
@@ -27296,14 +27696,14 @@
       </p:sp>
       <p:sp>
         <p:nvSpPr>
-          <p:cNvPr id="40" name="Shape 38"/>
-          <p:cNvSpPr/>
-          <p:nvPr/>
-        </p:nvSpPr>
-        <p:spPr>
-          <a:xfrm>
-            <a:off x="7031736" y="4169664"/>
-            <a:ext cx="685800" cy="475488"/>
+          <p:cNvPr id="45" name="Shape 43"/>
+          <p:cNvSpPr/>
+          <p:nvPr/>
+        </p:nvSpPr>
+        <p:spPr>
+          <a:xfrm>
+            <a:off x="4129430" y="4169664"/>
+            <a:ext cx="676656" cy="475488"/>
           </a:xfrm>
           <a:prstGeom prst="rect">
             <a:avLst>
@@ -27323,14 +27723,14 @@
       </p:sp>
       <p:sp>
         <p:nvSpPr>
-          <p:cNvPr id="41" name="Text 39"/>
-          <p:cNvSpPr/>
-          <p:nvPr/>
-        </p:nvSpPr>
-        <p:spPr>
-          <a:xfrm>
-            <a:off x="7031736" y="4169664"/>
-            <a:ext cx="685800" cy="475488"/>
+          <p:cNvPr id="46" name="Text 44"/>
+          <p:cNvSpPr/>
+          <p:nvPr/>
+        </p:nvSpPr>
+        <p:spPr>
+          <a:xfrm>
+            <a:off x="4129430" y="4169664"/>
+            <a:ext cx="676656" cy="475488"/>
           </a:xfrm>
           <a:prstGeom prst="rect">
             <a:avLst/>
@@ -27354,7 +27754,337 @@
                 <a:ea typeface="Trebuchet MS" pitchFamily="34" charset="-122"/>
                 <a:cs typeface="Trebuchet MS" pitchFamily="34" charset="-120"/>
               </a:rPr>
-              <a:t>ing</a:t>
+              <a:t>e</a:t>
+            </a:r>
+            <a:endParaRPr lang="en-US" sz="900" dirty="0"/>
+          </a:p>
+        </p:txBody>
+      </p:sp>
+      <p:sp>
+        <p:nvSpPr>
+          <p:cNvPr id="47" name="Shape 45"/>
+          <p:cNvSpPr/>
+          <p:nvPr/>
+        </p:nvSpPr>
+        <p:spPr>
+          <a:xfrm>
+            <a:off x="4855464" y="4169664"/>
+            <a:ext cx="676656" cy="475488"/>
+          </a:xfrm>
+          <a:prstGeom prst="rect">
+            <a:avLst>
+              <a:gd name="adj" fmla="val 7692"/>
+            </a:avLst>
+          </a:prstGeom>
+          <a:solidFill>
+            <a:srgbClr val="FFFFFF"/>
+          </a:solidFill>
+          <a:ln w="12700">
+            <a:solidFill>
+              <a:srgbClr val="DB2777"/>
+            </a:solidFill>
+            <a:prstDash val="solid"/>
+          </a:ln>
+        </p:spPr>
+      </p:sp>
+      <p:sp>
+        <p:nvSpPr>
+          <p:cNvPr id="48" name="Text 46"/>
+          <p:cNvSpPr/>
+          <p:nvPr/>
+        </p:nvSpPr>
+        <p:spPr>
+          <a:xfrm>
+            <a:off x="4855464" y="4169664"/>
+            <a:ext cx="676656" cy="475488"/>
+          </a:xfrm>
+          <a:prstGeom prst="rect">
+            <a:avLst/>
+          </a:prstGeom>
+          <a:noFill/>
+          <a:ln/>
+        </p:spPr>
+        <p:txBody>
+          <a:bodyPr wrap="square" lIns="0" tIns="0" rIns="0" bIns="0" rtlCol="0" anchor="ctr"/>
+          <a:lstStyle/>
+          <a:p>
+            <a:pPr algn="ctr" indent="0" marL="0">
+              <a:buNone/>
+            </a:pPr>
+            <a:r>
+              <a:rPr lang="en-US" sz="900" b="1" dirty="0">
+                <a:solidFill>
+                  <a:srgbClr val="9D174D"/>
+                </a:solidFill>
+                <a:latin typeface="Trebuchet MS" pitchFamily="34" charset="0"/>
+                <a:ea typeface="Trebuchet MS" pitchFamily="34" charset="-122"/>
+                <a:cs typeface="Trebuchet MS" pitchFamily="34" charset="-120"/>
+              </a:rPr>
+              <a:t>f</a:t>
+            </a:r>
+            <a:endParaRPr lang="en-US" sz="900" dirty="0"/>
+          </a:p>
+        </p:txBody>
+      </p:sp>
+      <p:sp>
+        <p:nvSpPr>
+          <p:cNvPr id="49" name="Shape 47"/>
+          <p:cNvSpPr/>
+          <p:nvPr/>
+        </p:nvSpPr>
+        <p:spPr>
+          <a:xfrm>
+            <a:off x="5581498" y="4169664"/>
+            <a:ext cx="676656" cy="475488"/>
+          </a:xfrm>
+          <a:prstGeom prst="rect">
+            <a:avLst>
+              <a:gd name="adj" fmla="val 7692"/>
+            </a:avLst>
+          </a:prstGeom>
+          <a:solidFill>
+            <a:srgbClr val="FFFFFF"/>
+          </a:solidFill>
+          <a:ln w="12700">
+            <a:solidFill>
+              <a:srgbClr val="DB2777"/>
+            </a:solidFill>
+            <a:prstDash val="solid"/>
+          </a:ln>
+        </p:spPr>
+      </p:sp>
+      <p:sp>
+        <p:nvSpPr>
+          <p:cNvPr id="50" name="Text 48"/>
+          <p:cNvSpPr/>
+          <p:nvPr/>
+        </p:nvSpPr>
+        <p:spPr>
+          <a:xfrm>
+            <a:off x="5581498" y="4169664"/>
+            <a:ext cx="676656" cy="475488"/>
+          </a:xfrm>
+          <a:prstGeom prst="rect">
+            <a:avLst/>
+          </a:prstGeom>
+          <a:noFill/>
+          <a:ln/>
+        </p:spPr>
+        <p:txBody>
+          <a:bodyPr wrap="square" lIns="0" tIns="0" rIns="0" bIns="0" rtlCol="0" anchor="ctr"/>
+          <a:lstStyle/>
+          <a:p>
+            <a:pPr algn="ctr" indent="0" marL="0">
+              <a:buNone/>
+            </a:pPr>
+            <a:r>
+              <a:rPr lang="en-US" sz="900" b="1" dirty="0">
+                <a:solidFill>
+                  <a:srgbClr val="9D174D"/>
+                </a:solidFill>
+                <a:latin typeface="Trebuchet MS" pitchFamily="34" charset="0"/>
+                <a:ea typeface="Trebuchet MS" pitchFamily="34" charset="-122"/>
+                <a:cs typeface="Trebuchet MS" pitchFamily="34" charset="-120"/>
+              </a:rPr>
+              <a:t>ul</a:t>
+            </a:r>
+            <a:endParaRPr lang="en-US" sz="900" dirty="0"/>
+          </a:p>
+        </p:txBody>
+      </p:sp>
+      <p:sp>
+        <p:nvSpPr>
+          <p:cNvPr id="51" name="Shape 49"/>
+          <p:cNvSpPr/>
+          <p:nvPr/>
+        </p:nvSpPr>
+        <p:spPr>
+          <a:xfrm>
+            <a:off x="6307531" y="4169664"/>
+            <a:ext cx="676656" cy="475488"/>
+          </a:xfrm>
+          <a:prstGeom prst="rect">
+            <a:avLst>
+              <a:gd name="adj" fmla="val 7692"/>
+            </a:avLst>
+          </a:prstGeom>
+          <a:solidFill>
+            <a:srgbClr val="FFFFFF"/>
+          </a:solidFill>
+          <a:ln w="12700">
+            <a:solidFill>
+              <a:srgbClr val="DB2777"/>
+            </a:solidFill>
+            <a:prstDash val="solid"/>
+          </a:ln>
+        </p:spPr>
+      </p:sp>
+      <p:sp>
+        <p:nvSpPr>
+          <p:cNvPr id="52" name="Text 50"/>
+          <p:cNvSpPr/>
+          <p:nvPr/>
+        </p:nvSpPr>
+        <p:spPr>
+          <a:xfrm>
+            <a:off x="6307531" y="4169664"/>
+            <a:ext cx="676656" cy="475488"/>
+          </a:xfrm>
+          <a:prstGeom prst="rect">
+            <a:avLst/>
+          </a:prstGeom>
+          <a:noFill/>
+          <a:ln/>
+        </p:spPr>
+        <p:txBody>
+          <a:bodyPr wrap="square" lIns="0" tIns="0" rIns="0" bIns="0" rtlCol="0" anchor="ctr"/>
+          <a:lstStyle/>
+          <a:p>
+            <a:pPr algn="ctr" indent="0" marL="0">
+              <a:buNone/>
+            </a:pPr>
+            <a:r>
+              <a:rPr lang="en-US" sz="900" b="1" dirty="0">
+                <a:solidFill>
+                  <a:srgbClr val="9D174D"/>
+                </a:solidFill>
+                <a:latin typeface="Trebuchet MS" pitchFamily="34" charset="0"/>
+                <a:ea typeface="Trebuchet MS" pitchFamily="34" charset="-122"/>
+                <a:cs typeface="Trebuchet MS" pitchFamily="34" charset="-120"/>
+              </a:rPr>
+              <a:t>n</a:t>
+            </a:r>
+            <a:endParaRPr lang="en-US" sz="900" dirty="0"/>
+          </a:p>
+        </p:txBody>
+      </p:sp>
+      <p:sp>
+        <p:nvSpPr>
+          <p:cNvPr id="53" name="Shape 51"/>
+          <p:cNvSpPr/>
+          <p:nvPr/>
+        </p:nvSpPr>
+        <p:spPr>
+          <a:xfrm>
+            <a:off x="7033565" y="4169664"/>
+            <a:ext cx="676656" cy="475488"/>
+          </a:xfrm>
+          <a:prstGeom prst="rect">
+            <a:avLst>
+              <a:gd name="adj" fmla="val 7692"/>
+            </a:avLst>
+          </a:prstGeom>
+          <a:solidFill>
+            <a:srgbClr val="FFFFFF"/>
+          </a:solidFill>
+          <a:ln w="12700">
+            <a:solidFill>
+              <a:srgbClr val="DB2777"/>
+            </a:solidFill>
+            <a:prstDash val="solid"/>
+          </a:ln>
+        </p:spPr>
+      </p:sp>
+      <p:sp>
+        <p:nvSpPr>
+          <p:cNvPr id="54" name="Text 52"/>
+          <p:cNvSpPr/>
+          <p:nvPr/>
+        </p:nvSpPr>
+        <p:spPr>
+          <a:xfrm>
+            <a:off x="7033565" y="4169664"/>
+            <a:ext cx="676656" cy="475488"/>
+          </a:xfrm>
+          <a:prstGeom prst="rect">
+            <a:avLst/>
+          </a:prstGeom>
+          <a:noFill/>
+          <a:ln/>
+        </p:spPr>
+        <p:txBody>
+          <a:bodyPr wrap="square" lIns="0" tIns="0" rIns="0" bIns="0" rtlCol="0" anchor="ctr"/>
+          <a:lstStyle/>
+          <a:p>
+            <a:pPr algn="ctr" indent="0" marL="0">
+              <a:buNone/>
+            </a:pPr>
+            <a:r>
+              <a:rPr lang="en-US" sz="900" b="1" dirty="0">
+                <a:solidFill>
+                  <a:srgbClr val="9D174D"/>
+                </a:solidFill>
+                <a:latin typeface="Trebuchet MS" pitchFamily="34" charset="0"/>
+                <a:ea typeface="Trebuchet MS" pitchFamily="34" charset="-122"/>
+                <a:cs typeface="Trebuchet MS" pitchFamily="34" charset="-120"/>
+              </a:rPr>
+              <a:t>e</a:t>
+            </a:r>
+            <a:endParaRPr lang="en-US" sz="900" dirty="0"/>
+          </a:p>
+        </p:txBody>
+      </p:sp>
+      <p:sp>
+        <p:nvSpPr>
+          <p:cNvPr id="55" name="Shape 53"/>
+          <p:cNvSpPr/>
+          <p:nvPr/>
+        </p:nvSpPr>
+        <p:spPr>
+          <a:xfrm>
+            <a:off x="7759598" y="4169664"/>
+            <a:ext cx="676656" cy="475488"/>
+          </a:xfrm>
+          <a:prstGeom prst="rect">
+            <a:avLst>
+              <a:gd name="adj" fmla="val 7692"/>
+            </a:avLst>
+          </a:prstGeom>
+          <a:solidFill>
+            <a:srgbClr val="FFFFFF"/>
+          </a:solidFill>
+          <a:ln w="12700">
+            <a:solidFill>
+              <a:srgbClr val="DB2777"/>
+            </a:solidFill>
+            <a:prstDash val="solid"/>
+          </a:ln>
+        </p:spPr>
+      </p:sp>
+      <p:sp>
+        <p:nvSpPr>
+          <p:cNvPr id="56" name="Text 54"/>
+          <p:cNvSpPr/>
+          <p:nvPr/>
+        </p:nvSpPr>
+        <p:spPr>
+          <a:xfrm>
+            <a:off x="7759598" y="4169664"/>
+            <a:ext cx="676656" cy="475488"/>
+          </a:xfrm>
+          <a:prstGeom prst="rect">
+            <a:avLst/>
+          </a:prstGeom>
+          <a:noFill/>
+          <a:ln/>
+        </p:spPr>
+        <p:txBody>
+          <a:bodyPr wrap="square" lIns="0" tIns="0" rIns="0" bIns="0" rtlCol="0" anchor="ctr"/>
+          <a:lstStyle/>
+          <a:p>
+            <a:pPr algn="ctr" indent="0" marL="0">
+              <a:buNone/>
+            </a:pPr>
+            <a:r>
+              <a:rPr lang="en-US" sz="900" b="1" dirty="0">
+                <a:solidFill>
+                  <a:srgbClr val="9D174D"/>
+                </a:solidFill>
+                <a:latin typeface="Trebuchet MS" pitchFamily="34" charset="0"/>
+                <a:ea typeface="Trebuchet MS" pitchFamily="34" charset="-122"/>
+                <a:cs typeface="Trebuchet MS" pitchFamily="34" charset="-120"/>
+              </a:rPr>
+              <a:t>ss</a:t>
             </a:r>
             <a:endParaRPr lang="en-US" sz="900" dirty="0"/>
           </a:p>
@@ -27785,7 +28515,7 @@
                 <a:ea typeface="Trebuchet MS" pitchFamily="34" charset="-122"/>
                 <a:cs typeface="Trebuchet MS" pitchFamily="34" charset="-120"/>
               </a:rPr>
-              <a:t>awaken</a:t>
+              <a:t>rewoken</a:t>
             </a:r>
             <a:endParaRPr lang="en-US" sz="2800" dirty="0"/>
           </a:p>
@@ -28612,7 +29342,7 @@
                 <a:ea typeface="Trebuchet MS" pitchFamily="34" charset="-122"/>
                 <a:cs typeface="Trebuchet MS" pitchFamily="34" charset="-120"/>
               </a:rPr>
-              <a:t>awaken</a:t>
+              <a:t>rewoken</a:t>
             </a:r>
             <a:endParaRPr lang="en-US" sz="2800" dirty="0"/>
           </a:p>
@@ -28751,7 +29481,7 @@
                 <a:ea typeface="Trebuchet MS" pitchFamily="34" charset="-122"/>
                 <a:cs typeface="Trebuchet MS" pitchFamily="34" charset="-120"/>
               </a:rPr>
-              <a:t>a</a:t>
+              <a:t>re</a:t>
             </a:r>
             <a:endParaRPr lang="en-US" sz="1300" dirty="0"/>
           </a:p>
@@ -28790,7 +29520,7 @@
                 <a:ea typeface="Calibri" pitchFamily="34" charset="-122"/>
                 <a:cs typeface="Calibri" pitchFamily="34" charset="-120"/>
               </a:rPr>
-              <a:t>on, in a state of</a:t>
+              <a:t>again</a:t>
             </a:r>
             <a:endParaRPr lang="en-US" sz="850" dirty="0"/>
           </a:p>
@@ -28975,7 +29705,7 @@
                 <a:ea typeface="Trebuchet MS" pitchFamily="34" charset="-122"/>
                 <a:cs typeface="Trebuchet MS" pitchFamily="34" charset="-120"/>
               </a:rPr>
-              <a:t>n</a:t>
+              <a:t>en</a:t>
             </a:r>
             <a:endParaRPr lang="en-US" sz="1300" dirty="0"/>
           </a:p>
@@ -29014,7 +29744,7 @@
                 <a:ea typeface="Calibri" pitchFamily="34" charset="-122"/>
                 <a:cs typeface="Calibri" pitchFamily="34" charset="-120"/>
               </a:rPr>
-              <a:t>verb-forming suffix</a:t>
+              <a:t>to cause or become</a:t>
             </a:r>
             <a:endParaRPr lang="en-US" sz="850" dirty="0"/>
           </a:p>
@@ -29709,7 +30439,7 @@
                 <a:ea typeface="Trebuchet MS" pitchFamily="34" charset="-122"/>
                 <a:cs typeface="Trebuchet MS" pitchFamily="34" charset="-120"/>
               </a:rPr>
-              <a:t>awaken</a:t>
+              <a:t>rewoken</a:t>
             </a:r>
             <a:endParaRPr lang="en-US" sz="2800" dirty="0"/>
           </a:p>
@@ -29848,7 +30578,7 @@
                 <a:ea typeface="Trebuchet MS" pitchFamily="34" charset="-122"/>
                 <a:cs typeface="Trebuchet MS" pitchFamily="34" charset="-120"/>
               </a:rPr>
-              <a:t>a</a:t>
+              <a:t>re</a:t>
             </a:r>
             <a:endParaRPr lang="en-US" sz="1300" dirty="0"/>
           </a:p>
@@ -29887,7 +30617,7 @@
                 <a:ea typeface="Calibri" pitchFamily="34" charset="-122"/>
                 <a:cs typeface="Calibri" pitchFamily="34" charset="-120"/>
               </a:rPr>
-              <a:t>on, in a state of</a:t>
+              <a:t>again</a:t>
             </a:r>
             <a:endParaRPr lang="en-US" sz="850" dirty="0"/>
           </a:p>
@@ -30072,7 +30802,7 @@
                 <a:ea typeface="Trebuchet MS" pitchFamily="34" charset="-122"/>
                 <a:cs typeface="Trebuchet MS" pitchFamily="34" charset="-120"/>
               </a:rPr>
-              <a:t>n</a:t>
+              <a:t>en</a:t>
             </a:r>
             <a:endParaRPr lang="en-US" sz="1300" dirty="0"/>
           </a:p>
@@ -30111,7 +30841,7 @@
                 <a:ea typeface="Calibri" pitchFamily="34" charset="-122"/>
                 <a:cs typeface="Calibri" pitchFamily="34" charset="-120"/>
               </a:rPr>
-              <a:t>verb-forming suffix</a:t>
+              <a:t>to cause or become</a:t>
             </a:r>
             <a:endParaRPr lang="en-US" sz="850" dirty="0"/>
           </a:p>
@@ -30270,7 +31000,7 @@
                 <a:ea typeface="Trebuchet MS" pitchFamily="34" charset="-122"/>
                 <a:cs typeface="Trebuchet MS" pitchFamily="34" charset="-120"/>
               </a:rPr>
-              <a:t>a</a:t>
+              <a:t>re</a:t>
             </a:r>
             <a:endParaRPr lang="en-US" sz="1400" dirty="0"/>
           </a:p>
@@ -30375,7 +31105,7 @@
                 <a:ea typeface="Trebuchet MS" pitchFamily="34" charset="-122"/>
                 <a:cs typeface="Trebuchet MS" pitchFamily="34" charset="-120"/>
               </a:rPr>
-              <a:t>wa</a:t>
+              <a:t>wo</a:t>
             </a:r>
             <a:endParaRPr lang="en-US" sz="1400" dirty="0"/>
           </a:p>
@@ -31043,7 +31773,7 @@
                 <a:ea typeface="Trebuchet MS" pitchFamily="34" charset="-122"/>
                 <a:cs typeface="Trebuchet MS" pitchFamily="34" charset="-120"/>
               </a:rPr>
-              <a:t>awaken</a:t>
+              <a:t>rewoken</a:t>
             </a:r>
             <a:endParaRPr lang="en-US" sz="2800" dirty="0"/>
           </a:p>
@@ -31182,7 +31912,7 @@
                 <a:ea typeface="Trebuchet MS" pitchFamily="34" charset="-122"/>
                 <a:cs typeface="Trebuchet MS" pitchFamily="34" charset="-120"/>
               </a:rPr>
-              <a:t>a</a:t>
+              <a:t>re</a:t>
             </a:r>
             <a:endParaRPr lang="en-US" sz="1300" dirty="0"/>
           </a:p>
@@ -31221,7 +31951,7 @@
                 <a:ea typeface="Calibri" pitchFamily="34" charset="-122"/>
                 <a:cs typeface="Calibri" pitchFamily="34" charset="-120"/>
               </a:rPr>
-              <a:t>on, in a state of</a:t>
+              <a:t>again</a:t>
             </a:r>
             <a:endParaRPr lang="en-US" sz="850" dirty="0"/>
           </a:p>
@@ -31406,7 +32136,7 @@
                 <a:ea typeface="Trebuchet MS" pitchFamily="34" charset="-122"/>
                 <a:cs typeface="Trebuchet MS" pitchFamily="34" charset="-120"/>
               </a:rPr>
-              <a:t>n</a:t>
+              <a:t>en</a:t>
             </a:r>
             <a:endParaRPr lang="en-US" sz="1300" dirty="0"/>
           </a:p>
@@ -31445,7 +32175,7 @@
                 <a:ea typeface="Calibri" pitchFamily="34" charset="-122"/>
                 <a:cs typeface="Calibri" pitchFamily="34" charset="-120"/>
               </a:rPr>
-              <a:t>verb-forming suffix</a:t>
+              <a:t>to cause or become</a:t>
             </a:r>
             <a:endParaRPr lang="en-US" sz="850" dirty="0"/>
           </a:p>
@@ -31604,7 +32334,7 @@
                 <a:ea typeface="Trebuchet MS" pitchFamily="34" charset="-122"/>
                 <a:cs typeface="Trebuchet MS" pitchFamily="34" charset="-120"/>
               </a:rPr>
-              <a:t>a</a:t>
+              <a:t>re</a:t>
             </a:r>
             <a:endParaRPr lang="en-US" sz="1400" dirty="0"/>
           </a:p>
@@ -31709,7 +32439,7 @@
                 <a:ea typeface="Trebuchet MS" pitchFamily="34" charset="-122"/>
                 <a:cs typeface="Trebuchet MS" pitchFamily="34" charset="-120"/>
               </a:rPr>
-              <a:t>wa</a:t>
+              <a:t>wo</a:t>
             </a:r>
             <a:endParaRPr lang="en-US" sz="1400" dirty="0"/>
           </a:p>
@@ -31973,7 +32703,7 @@
                 <a:ea typeface="Trebuchet MS" pitchFamily="34" charset="-122"/>
                 <a:cs typeface="Trebuchet MS" pitchFamily="34" charset="-120"/>
               </a:rPr>
-              <a:t>a</a:t>
+              <a:t>r</a:t>
             </a:r>
             <a:endParaRPr lang="en-US" sz="900" dirty="0"/>
           </a:p>
@@ -32039,7 +32769,7 @@
                 <a:ea typeface="Trebuchet MS" pitchFamily="34" charset="-122"/>
                 <a:cs typeface="Trebuchet MS" pitchFamily="34" charset="-120"/>
               </a:rPr>
-              <a:t>w</a:t>
+              <a:t>e</a:t>
             </a:r>
             <a:endParaRPr lang="en-US" sz="900" dirty="0"/>
           </a:p>
@@ -32105,7 +32835,7 @@
                 <a:ea typeface="Trebuchet MS" pitchFamily="34" charset="-122"/>
                 <a:cs typeface="Trebuchet MS" pitchFamily="34" charset="-120"/>
               </a:rPr>
-              <a:t>a</a:t>
+              <a:t>w</a:t>
             </a:r>
             <a:endParaRPr lang="en-US" sz="900" dirty="0"/>
           </a:p>
@@ -32171,7 +32901,7 @@
                 <a:ea typeface="Trebuchet MS" pitchFamily="34" charset="-122"/>
                 <a:cs typeface="Trebuchet MS" pitchFamily="34" charset="-120"/>
               </a:rPr>
-              <a:t>k</a:t>
+              <a:t>o</a:t>
             </a:r>
             <a:endParaRPr lang="en-US" sz="900" dirty="0"/>
           </a:p>
@@ -32237,7 +32967,7 @@
                 <a:ea typeface="Trebuchet MS" pitchFamily="34" charset="-122"/>
                 <a:cs typeface="Trebuchet MS" pitchFamily="34" charset="-120"/>
               </a:rPr>
-              <a:t>e</a:t>
+              <a:t>k</a:t>
             </a:r>
             <a:endParaRPr lang="en-US" sz="900" dirty="0"/>
           </a:p>
@@ -32303,7 +33033,7 @@
                 <a:ea typeface="Trebuchet MS" pitchFamily="34" charset="-122"/>
                 <a:cs typeface="Trebuchet MS" pitchFamily="34" charset="-120"/>
               </a:rPr>
-              <a:t>n</a:t>
+              <a:t>en</a:t>
             </a:r>
             <a:endParaRPr lang="en-US" sz="900" dirty="0"/>
           </a:p>
@@ -34193,7 +34923,7 @@
                 <a:ea typeface="Trebuchet MS" pitchFamily="34" charset="-122"/>
                 <a:cs typeface="Trebuchet MS" pitchFamily="34" charset="-120"/>
               </a:rPr>
-              <a:t>-ful</a:t>
+              <a:t>-en</a:t>
             </a:r>
             <a:endParaRPr lang="en-US" sz="1300" dirty="0"/>
           </a:p>
@@ -34257,7 +34987,7 @@
                 <a:ea typeface="Trebuchet MS" pitchFamily="34" charset="-122"/>
                 <a:cs typeface="Trebuchet MS" pitchFamily="34" charset="-120"/>
               </a:rPr>
-              <a:t>for-</a:t>
+              <a:t>re-</a:t>
             </a:r>
             <a:endParaRPr lang="en-US" sz="1300" dirty="0"/>
           </a:p>
@@ -34346,7 +35076,7 @@
                 <a:ea typeface="Trebuchet MS" pitchFamily="34" charset="-122"/>
                 <a:cs typeface="Trebuchet MS" pitchFamily="34" charset="-120"/>
               </a:rPr>
-              <a:t>-s</a:t>
+              <a:t>-ful</a:t>
             </a:r>
             <a:endParaRPr lang="en-US" sz="1300" dirty="0"/>
           </a:p>
@@ -34410,7 +35140,7 @@
                 <a:ea typeface="Trebuchet MS" pitchFamily="34" charset="-122"/>
                 <a:cs typeface="Trebuchet MS" pitchFamily="34" charset="-120"/>
               </a:rPr>
-              <a:t>out-</a:t>
+              <a:t>fore-</a:t>
             </a:r>
             <a:endParaRPr lang="en-US" sz="1300" dirty="0"/>
           </a:p>
@@ -34499,7 +35229,7 @@
                 <a:ea typeface="Trebuchet MS" pitchFamily="34" charset="-122"/>
                 <a:cs typeface="Trebuchet MS" pitchFamily="34" charset="-120"/>
               </a:rPr>
-              <a:t>-ed</a:t>
+              <a:t>-ing</a:t>
             </a:r>
             <a:endParaRPr lang="en-US" sz="1300" dirty="0"/>
           </a:p>
@@ -34563,7 +35293,7 @@
                 <a:ea typeface="Trebuchet MS" pitchFamily="34" charset="-122"/>
                 <a:cs typeface="Trebuchet MS" pitchFamily="34" charset="-120"/>
               </a:rPr>
-              <a:t>re-</a:t>
+              <a:t>out-</a:t>
             </a:r>
             <a:endParaRPr lang="en-US" sz="1300" dirty="0"/>
           </a:p>
@@ -34652,7 +35382,7 @@
                 <a:ea typeface="Trebuchet MS" pitchFamily="34" charset="-122"/>
                 <a:cs typeface="Trebuchet MS" pitchFamily="34" charset="-120"/>
               </a:rPr>
-              <a:t>-ing</a:t>
+              <a:t>-ed</a:t>
             </a:r>
             <a:endParaRPr lang="en-US" sz="1300" dirty="0"/>
           </a:p>
@@ -34716,7 +35446,7 @@
                 <a:ea typeface="Trebuchet MS" pitchFamily="34" charset="-122"/>
                 <a:cs typeface="Trebuchet MS" pitchFamily="34" charset="-120"/>
               </a:rPr>
-              <a:t>un-</a:t>
+              <a:t>be-</a:t>
             </a:r>
             <a:endParaRPr lang="en-US" sz="1300" dirty="0"/>
           </a:p>
@@ -34805,7 +35535,7 @@
                 <a:ea typeface="Trebuchet MS" pitchFamily="34" charset="-122"/>
                 <a:cs typeface="Trebuchet MS" pitchFamily="34" charset="-120"/>
               </a:rPr>
-              <a:t>-n</a:t>
+              <a:t>-ness</a:t>
             </a:r>
             <a:endParaRPr lang="en-US" sz="1300" dirty="0"/>
           </a:p>
@@ -34976,7 +35706,7 @@
                 <a:ea typeface="Trebuchet MS" pitchFamily="34" charset="-122"/>
                 <a:cs typeface="Trebuchet MS" pitchFamily="34" charset="-120"/>
               </a:rPr>
-              <a:t>waken</a:t>
+              <a:t>awaken</a:t>
             </a:r>
             <a:endParaRPr lang="en-US" sz="1200" dirty="0"/>
           </a:p>
@@ -35042,7 +35772,7 @@
                 <a:ea typeface="Trebuchet MS" pitchFamily="34" charset="-122"/>
                 <a:cs typeface="Trebuchet MS" pitchFamily="34" charset="-120"/>
               </a:rPr>
-              <a:t>wakeful</a:t>
+              <a:t>rewake</a:t>
             </a:r>
             <a:endParaRPr lang="en-US" sz="1200" dirty="0"/>
           </a:p>
@@ -35108,7 +35838,7 @@
                 <a:ea typeface="Trebuchet MS" pitchFamily="34" charset="-122"/>
                 <a:cs typeface="Trebuchet MS" pitchFamily="34" charset="-120"/>
               </a:rPr>
-              <a:t>rewake</a:t>
+              <a:t>wakeful</a:t>
             </a:r>
             <a:endParaRPr lang="en-US" sz="1200" dirty="0"/>
           </a:p>
@@ -35240,7 +35970,7 @@
                 <a:ea typeface="Trebuchet MS" pitchFamily="34" charset="-122"/>
                 <a:cs typeface="Trebuchet MS" pitchFamily="34" charset="-120"/>
               </a:rPr>
-              <a:t>wakes</a:t>
+              <a:t>woken</a:t>
             </a:r>
             <a:endParaRPr lang="en-US" sz="1200" dirty="0"/>
           </a:p>
@@ -35306,7 +36036,7 @@
                 <a:ea typeface="Trebuchet MS" pitchFamily="34" charset="-122"/>
                 <a:cs typeface="Trebuchet MS" pitchFamily="34" charset="-120"/>
               </a:rPr>
-              <a:t>awaken</a:t>
+              <a:t>wakened</a:t>
             </a:r>
             <a:endParaRPr lang="en-US" sz="1200" dirty="0"/>
           </a:p>
@@ -35372,7 +36102,7 @@
                 <a:ea typeface="Trebuchet MS" pitchFamily="34" charset="-122"/>
                 <a:cs typeface="Trebuchet MS" pitchFamily="34" charset="-120"/>
               </a:rPr>
-              <a:t>outwake</a:t>
+              <a:t>wakefulness</a:t>
             </a:r>
             <a:endParaRPr lang="en-US" sz="1200" dirty="0"/>
           </a:p>
@@ -36560,7 +37290,7 @@
                 <a:ea typeface="Calibri" pitchFamily="34" charset="-122"/>
                 <a:cs typeface="Calibri" pitchFamily="34" charset="-120"/>
               </a:rPr>
-              <a:t>1.  The word 'awake' contains the root 'wake' meaning to rouse from sleep.</a:t>
+              <a:t>1.  The prefix 're-' in 'rewake' means 'before'.</a:t>
             </a:r>
             <a:endParaRPr lang="en-US" sz="1300" dirty="0"/>
           </a:p>
@@ -36583,11 +37313,11 @@
             </a:avLst>
           </a:prstGeom>
           <a:solidFill>
-            <a:srgbClr val="DCFCE7"/>
-          </a:solidFill>
-          <a:ln w="12700">
-            <a:solidFill>
-              <a:srgbClr val="16A34A"/>
+            <a:srgbClr val="FEE2E2"/>
+          </a:solidFill>
+          <a:ln w="12700">
+            <a:solidFill>
+              <a:srgbClr val="DC2626"/>
             </a:solidFill>
             <a:prstDash val="solid"/>
           </a:ln>
@@ -36620,13 +37350,13 @@
             <a:r>
               <a:rPr lang="en-US" sz="1100" b="1" dirty="0">
                 <a:solidFill>
-                  <a:srgbClr val="16A34A"/>
+                  <a:srgbClr val="DC2626"/>
                 </a:solidFill>
                 <a:latin typeface="Trebuchet MS" pitchFamily="34" charset="0"/>
                 <a:ea typeface="Trebuchet MS" pitchFamily="34" charset="-122"/>
                 <a:cs typeface="Trebuchet MS" pitchFamily="34" charset="-120"/>
               </a:rPr>
-              <a:t>TRUE</a:t>
+              <a:t>FALSE</a:t>
             </a:r>
             <a:endParaRPr lang="en-US" sz="1100" dirty="0"/>
           </a:p>
@@ -36699,7 +37429,7 @@
                 <a:ea typeface="Calibri" pitchFamily="34" charset="-122"/>
                 <a:cs typeface="Calibri" pitchFamily="34" charset="-120"/>
               </a:rPr>
-              <a:t>2.  The root 'wake' comes from the Latin language.</a:t>
+              <a:t>2.  The word 'wakefulness' has both a suffix and the root 'wake' in it.</a:t>
             </a:r>
             <a:endParaRPr lang="en-US" sz="1300" dirty="0"/>
           </a:p>
@@ -36722,11 +37452,11 @@
             </a:avLst>
           </a:prstGeom>
           <a:solidFill>
-            <a:srgbClr val="FEE2E2"/>
-          </a:solidFill>
-          <a:ln w="12700">
-            <a:solidFill>
-              <a:srgbClr val="DC2626"/>
+            <a:srgbClr val="DCFCE7"/>
+          </a:solidFill>
+          <a:ln w="12700">
+            <a:solidFill>
+              <a:srgbClr val="16A34A"/>
             </a:solidFill>
             <a:prstDash val="solid"/>
           </a:ln>
@@ -36759,13 +37489,13 @@
             <a:r>
               <a:rPr lang="en-US" sz="1100" b="1" dirty="0">
                 <a:solidFill>
-                  <a:srgbClr val="DC2626"/>
+                  <a:srgbClr val="16A34A"/>
                 </a:solidFill>
                 <a:latin typeface="Trebuchet MS" pitchFamily="34" charset="0"/>
                 <a:ea typeface="Trebuchet MS" pitchFamily="34" charset="-122"/>
                 <a:cs typeface="Trebuchet MS" pitchFamily="34" charset="-120"/>
               </a:rPr>
-              <a:t>FALSE</a:t>
+              <a:t>TRUE</a:t>
             </a:r>
             <a:endParaRPr lang="en-US" sz="1100" dirty="0"/>
           </a:p>
@@ -36838,7 +37568,7 @@
                 <a:ea typeface="Calibri" pitchFamily="34" charset="-122"/>
                 <a:cs typeface="Calibri" pitchFamily="34" charset="-120"/>
               </a:rPr>
-              <a:t>3.  Adding the suffix '-ful' to 'wake' makes the word 'wakeful', meaning unable to sleep well.</a:t>
+              <a:t>3.  Adding the suffix '-ful' to 'wake' makes the word 'wakeful'.</a:t>
             </a:r>
             <a:endParaRPr lang="en-US" sz="1300" dirty="0"/>
           </a:p>
@@ -36977,7 +37707,7 @@
                 <a:ea typeface="Calibri" pitchFamily="34" charset="-122"/>
                 <a:cs typeface="Calibri" pitchFamily="34" charset="-120"/>
               </a:rPr>
-              <a:t>4.  The word 'awaken' uses both a prefix and a suffix attached to the root 'wake'.</a:t>
+              <a:t>4.  The root 'wake' means to fall into a deep sleep.</a:t>
             </a:r>
             <a:endParaRPr lang="en-US" sz="1300" dirty="0"/>
           </a:p>
@@ -37000,11 +37730,11 @@
             </a:avLst>
           </a:prstGeom>
           <a:solidFill>
-            <a:srgbClr val="DCFCE7"/>
-          </a:solidFill>
-          <a:ln w="12700">
-            <a:solidFill>
-              <a:srgbClr val="16A34A"/>
+            <a:srgbClr val="FEE2E2"/>
+          </a:solidFill>
+          <a:ln w="12700">
+            <a:solidFill>
+              <a:srgbClr val="DC2626"/>
             </a:solidFill>
             <a:prstDash val="solid"/>
           </a:ln>
@@ -37037,13 +37767,13 @@
             <a:r>
               <a:rPr lang="en-US" sz="1100" b="1" dirty="0">
                 <a:solidFill>
-                  <a:srgbClr val="16A34A"/>
+                  <a:srgbClr val="DC2626"/>
                 </a:solidFill>
                 <a:latin typeface="Trebuchet MS" pitchFamily="34" charset="0"/>
                 <a:ea typeface="Trebuchet MS" pitchFamily="34" charset="-122"/>
                 <a:cs typeface="Trebuchet MS" pitchFamily="34" charset="-120"/>
               </a:rPr>
-              <a:t>TRUE</a:t>
+              <a:t>FALSE</a:t>
             </a:r>
             <a:endParaRPr lang="en-US" sz="1100" dirty="0"/>
           </a:p>
@@ -37116,7 +37846,7 @@
                 <a:ea typeface="Calibri" pitchFamily="34" charset="-122"/>
                 <a:cs typeface="Calibri" pitchFamily="34" charset="-120"/>
               </a:rPr>
-              <a:t>5.  The prefix 're-' in 'rewake' means before, so rewake means to wake before others.</a:t>
+              <a:t>5.  The word 'awake' contains the root 'wake'.</a:t>
             </a:r>
             <a:endParaRPr lang="en-US" sz="1300" dirty="0"/>
           </a:p>
@@ -37139,11 +37869,11 @@
             </a:avLst>
           </a:prstGeom>
           <a:solidFill>
-            <a:srgbClr val="FEE2E2"/>
-          </a:solidFill>
-          <a:ln w="12700">
-            <a:solidFill>
-              <a:srgbClr val="DC2626"/>
+            <a:srgbClr val="DCFCE7"/>
+          </a:solidFill>
+          <a:ln w="12700">
+            <a:solidFill>
+              <a:srgbClr val="16A34A"/>
             </a:solidFill>
             <a:prstDash val="solid"/>
           </a:ln>
@@ -37176,13 +37906,13 @@
             <a:r>
               <a:rPr lang="en-US" sz="1100" b="1" dirty="0">
                 <a:solidFill>
-                  <a:srgbClr val="DC2626"/>
+                  <a:srgbClr val="16A34A"/>
                 </a:solidFill>
                 <a:latin typeface="Trebuchet MS" pitchFamily="34" charset="0"/>
                 <a:ea typeface="Trebuchet MS" pitchFamily="34" charset="-122"/>
                 <a:cs typeface="Trebuchet MS" pitchFamily="34" charset="-120"/>
               </a:rPr>
-              <a:t>FALSE</a:t>
+              <a:t>TRUE</a:t>
             </a:r>
             <a:endParaRPr lang="en-US" sz="1100" dirty="0"/>
           </a:p>
@@ -37650,7 +38380,7 @@
                 <a:ea typeface="Calibri" pitchFamily="34" charset="-122"/>
                 <a:cs typeface="Calibri" pitchFamily="34" charset="-120"/>
               </a:rPr>
-              <a:t>Origin: Old English: wacan</a:t>
+              <a:t>Origin: Latin: vigilare</a:t>
             </a:r>
             <a:endParaRPr lang="en-US" sz="1100" dirty="0"/>
           </a:p>
@@ -37821,7 +38551,7 @@
                 <a:ea typeface="Trebuchet MS" pitchFamily="34" charset="-122"/>
                 <a:cs typeface="Trebuchet MS" pitchFamily="34" charset="-120"/>
               </a:rPr>
-              <a:t>waken</a:t>
+              <a:t>awaken</a:t>
             </a:r>
             <a:endParaRPr lang="en-US" sz="1300" dirty="0"/>
           </a:p>
@@ -37887,7 +38617,7 @@
                 <a:ea typeface="Trebuchet MS" pitchFamily="34" charset="-122"/>
                 <a:cs typeface="Trebuchet MS" pitchFamily="34" charset="-120"/>
               </a:rPr>
-              <a:t>wakeful</a:t>
+              <a:t>rewake</a:t>
             </a:r>
             <a:endParaRPr lang="en-US" sz="1300" dirty="0"/>
           </a:p>
@@ -37953,7 +38683,7 @@
                 <a:ea typeface="Trebuchet MS" pitchFamily="34" charset="-122"/>
                 <a:cs typeface="Trebuchet MS" pitchFamily="34" charset="-120"/>
               </a:rPr>
-              <a:t>rewake</a:t>
+              <a:t>wakeful</a:t>
             </a:r>
             <a:endParaRPr lang="en-US" sz="1300" dirty="0"/>
           </a:p>
@@ -38085,7 +38815,7 @@
                 <a:ea typeface="Trebuchet MS" pitchFamily="34" charset="-122"/>
                 <a:cs typeface="Trebuchet MS" pitchFamily="34" charset="-120"/>
               </a:rPr>
-              <a:t>wakes</a:t>
+              <a:t>woken</a:t>
             </a:r>
             <a:endParaRPr lang="en-US" sz="1300" dirty="0"/>
           </a:p>
@@ -38151,7 +38881,7 @@
                 <a:ea typeface="Trebuchet MS" pitchFamily="34" charset="-122"/>
                 <a:cs typeface="Trebuchet MS" pitchFamily="34" charset="-120"/>
               </a:rPr>
-              <a:t>awaken</a:t>
+              <a:t>wakened</a:t>
             </a:r>
             <a:endParaRPr lang="en-US" sz="1300" dirty="0"/>
           </a:p>
@@ -38872,7 +39602,7 @@
                 <a:ea typeface="Trebuchet MS" pitchFamily="34" charset="-122"/>
                 <a:cs typeface="Trebuchet MS" pitchFamily="34" charset="-120"/>
               </a:rPr>
-              <a:t>-ful</a:t>
+              <a:t>-en</a:t>
             </a:r>
             <a:endParaRPr lang="en-US" sz="1300" dirty="0"/>
           </a:p>
@@ -38936,7 +39666,7 @@
                 <a:ea typeface="Trebuchet MS" pitchFamily="34" charset="-122"/>
                 <a:cs typeface="Trebuchet MS" pitchFamily="34" charset="-120"/>
               </a:rPr>
-              <a:t>for-</a:t>
+              <a:t>re-</a:t>
             </a:r>
             <a:endParaRPr lang="en-US" sz="1300" dirty="0"/>
           </a:p>
@@ -39025,7 +39755,7 @@
                 <a:ea typeface="Trebuchet MS" pitchFamily="34" charset="-122"/>
                 <a:cs typeface="Trebuchet MS" pitchFamily="34" charset="-120"/>
               </a:rPr>
-              <a:t>-s</a:t>
+              <a:t>-ful</a:t>
             </a:r>
             <a:endParaRPr lang="en-US" sz="1300" dirty="0"/>
           </a:p>
@@ -39089,7 +39819,7 @@
                 <a:ea typeface="Trebuchet MS" pitchFamily="34" charset="-122"/>
                 <a:cs typeface="Trebuchet MS" pitchFamily="34" charset="-120"/>
               </a:rPr>
-              <a:t>out-</a:t>
+              <a:t>fore-</a:t>
             </a:r>
             <a:endParaRPr lang="en-US" sz="1300" dirty="0"/>
           </a:p>
@@ -39178,7 +39908,7 @@
                 <a:ea typeface="Trebuchet MS" pitchFamily="34" charset="-122"/>
                 <a:cs typeface="Trebuchet MS" pitchFamily="34" charset="-120"/>
               </a:rPr>
-              <a:t>-ed</a:t>
+              <a:t>-ing</a:t>
             </a:r>
             <a:endParaRPr lang="en-US" sz="1300" dirty="0"/>
           </a:p>
@@ -39242,7 +39972,7 @@
                 <a:ea typeface="Trebuchet MS" pitchFamily="34" charset="-122"/>
                 <a:cs typeface="Trebuchet MS" pitchFamily="34" charset="-120"/>
               </a:rPr>
-              <a:t>re-</a:t>
+              <a:t>out-</a:t>
             </a:r>
             <a:endParaRPr lang="en-US" sz="1300" dirty="0"/>
           </a:p>
@@ -39331,7 +40061,7 @@
                 <a:ea typeface="Trebuchet MS" pitchFamily="34" charset="-122"/>
                 <a:cs typeface="Trebuchet MS" pitchFamily="34" charset="-120"/>
               </a:rPr>
-              <a:t>-ing</a:t>
+              <a:t>-ed</a:t>
             </a:r>
             <a:endParaRPr lang="en-US" sz="1300" dirty="0"/>
           </a:p>
@@ -39395,7 +40125,7 @@
                 <a:ea typeface="Trebuchet MS" pitchFamily="34" charset="-122"/>
                 <a:cs typeface="Trebuchet MS" pitchFamily="34" charset="-120"/>
               </a:rPr>
-              <a:t>un-</a:t>
+              <a:t>be-</a:t>
             </a:r>
             <a:endParaRPr lang="en-US" sz="1300" dirty="0"/>
           </a:p>
@@ -39484,7 +40214,7 @@
                 <a:ea typeface="Trebuchet MS" pitchFamily="34" charset="-122"/>
                 <a:cs typeface="Trebuchet MS" pitchFamily="34" charset="-120"/>
               </a:rPr>
-              <a:t>-n</a:t>
+              <a:t>-ness</a:t>
             </a:r>
             <a:endParaRPr lang="en-US" sz="1300" dirty="0"/>
           </a:p>
@@ -39762,7 +40492,7 @@
         <p:spPr>
           <a:xfrm>
             <a:off x="4325112" y="4178808"/>
-            <a:ext cx="950976" cy="420624"/>
+            <a:ext cx="822960" cy="420624"/>
           </a:xfrm>
           <a:prstGeom prst="rect">
             <a:avLst>
@@ -39796,7 +40526,7 @@
         <p:spPr>
           <a:xfrm>
             <a:off x="4325112" y="4178808"/>
-            <a:ext cx="950976" cy="420624"/>
+            <a:ext cx="822960" cy="420624"/>
           </a:xfrm>
           <a:prstGeom prst="rect">
             <a:avLst/>
@@ -39820,7 +40550,7 @@
                 <a:ea typeface="Trebuchet MS" pitchFamily="34" charset="-122"/>
                 <a:cs typeface="Trebuchet MS" pitchFamily="34" charset="-120"/>
               </a:rPr>
-              <a:t>-ful</a:t>
+              <a:t>-en</a:t>
             </a:r>
             <a:endParaRPr lang="en-US" sz="1300" dirty="0"/>
           </a:p>
@@ -39834,7 +40564,7 @@
         </p:nvSpPr>
         <p:spPr>
           <a:xfrm>
-            <a:off x="5349240" y="4178808"/>
+            <a:off x="5221224" y="4178808"/>
             <a:ext cx="365760" cy="420624"/>
           </a:xfrm>
           <a:prstGeom prst="rect">
@@ -39873,7 +40603,7 @@
         </p:nvSpPr>
         <p:spPr>
           <a:xfrm>
-            <a:off x="5760720" y="4178808"/>
+            <a:off x="5632704" y="4178808"/>
             <a:ext cx="2194560" cy="420624"/>
           </a:xfrm>
           <a:prstGeom prst="rect">
@@ -39900,7 +40630,7 @@
         </p:nvSpPr>
         <p:spPr>
           <a:xfrm>
-            <a:off x="5760720" y="4178808"/>
+            <a:off x="5632704" y="4178808"/>
             <a:ext cx="2194560" cy="420624"/>
           </a:xfrm>
           <a:prstGeom prst="rect">
@@ -40395,7 +41125,7 @@
                 <a:ea typeface="Calibri" pitchFamily="34" charset="-122"/>
                 <a:cs typeface="Calibri" pitchFamily="34" charset="-120"/>
               </a:rPr>
-              <a:t>Unable to sleep well; staying alert and watchful through the night.</a:t>
+              <a:t>To wake up again after falling back to sleep.</a:t>
             </a:r>
             <a:endParaRPr lang="en-US" sz="1200" dirty="0"/>
           </a:p>
@@ -40468,7 +41198,7 @@
                 <a:ea typeface="Trebuchet MS" pitchFamily="34" charset="-122"/>
                 <a:cs typeface="Trebuchet MS" pitchFamily="34" charset="-120"/>
               </a:rPr>
-              <a:t>waken</a:t>
+              <a:t>awaken</a:t>
             </a:r>
             <a:endParaRPr lang="en-US" sz="1200" dirty="0"/>
           </a:p>
@@ -40534,7 +41264,7 @@
                 <a:ea typeface="Calibri" pitchFamily="34" charset="-122"/>
                 <a:cs typeface="Calibri" pitchFamily="34" charset="-120"/>
               </a:rPr>
-              <a:t>To wake up again after having fallen back to sleep.</a:t>
+              <a:t>Unable to sleep easily; staying alert and not sleeping.</a:t>
             </a:r>
             <a:endParaRPr lang="en-US" sz="1200" dirty="0"/>
           </a:p>
@@ -40607,7 +41337,7 @@
                 <a:ea typeface="Trebuchet MS" pitchFamily="34" charset="-122"/>
                 <a:cs typeface="Trebuchet MS" pitchFamily="34" charset="-120"/>
               </a:rPr>
-              <a:t>wakeful</a:t>
+              <a:t>rewake</a:t>
             </a:r>
             <a:endParaRPr lang="en-US" sz="1200" dirty="0"/>
           </a:p>
@@ -40673,7 +41403,7 @@
                 <a:ea typeface="Calibri" pitchFamily="34" charset="-122"/>
                 <a:cs typeface="Calibri" pitchFamily="34" charset="-120"/>
               </a:rPr>
-              <a:t>To rouse someone from sleep or to make someone aware of something.</a:t>
+              <a:t>Was made to stop sleeping; was roused from sleep.</a:t>
             </a:r>
             <a:endParaRPr lang="en-US" sz="1200" dirty="0"/>
           </a:p>
@@ -40746,7 +41476,7 @@
                 <a:ea typeface="Trebuchet MS" pitchFamily="34" charset="-122"/>
                 <a:cs typeface="Trebuchet MS" pitchFamily="34" charset="-120"/>
               </a:rPr>
-              <a:t>rewake</a:t>
+              <a:t>wakeful</a:t>
             </a:r>
             <a:endParaRPr lang="en-US" sz="1200" dirty="0"/>
           </a:p>
@@ -40812,7 +41542,7 @@
                 <a:ea typeface="Calibri" pitchFamily="34" charset="-122"/>
                 <a:cs typeface="Calibri" pitchFamily="34" charset="-120"/>
               </a:rPr>
-              <a:t>When someone or something causes a person to stop sleeping.</a:t>
+              <a:t>Having been roused from sleep; past tense of wake.</a:t>
             </a:r>
             <a:endParaRPr lang="en-US" sz="1200" dirty="0"/>
           </a:p>
@@ -40951,7 +41681,7 @@
                 <a:ea typeface="Calibri" pitchFamily="34" charset="-122"/>
                 <a:cs typeface="Calibri" pitchFamily="34" charset="-120"/>
               </a:rPr>
-              <a:t>Not asleep; fully alert and aware of your surroundings.</a:t>
+              <a:t>Not asleep; in a state of being alert and conscious.</a:t>
             </a:r>
             <a:endParaRPr lang="en-US" sz="1200" dirty="0"/>
           </a:p>
@@ -41024,7 +41754,7 @@
                 <a:ea typeface="Trebuchet MS" pitchFamily="34" charset="-122"/>
                 <a:cs typeface="Trebuchet MS" pitchFamily="34" charset="-120"/>
               </a:rPr>
-              <a:t>wakes</a:t>
+              <a:t>woken</a:t>
             </a:r>
             <a:endParaRPr lang="en-US" sz="1200" dirty="0"/>
           </a:p>
@@ -41090,7 +41820,7 @@
                 <a:ea typeface="Calibri" pitchFamily="34" charset="-122"/>
                 <a:cs typeface="Calibri" pitchFamily="34" charset="-120"/>
               </a:rPr>
-              <a:t>The time when you are not asleep; the act of stopping sleep.</a:t>
+              <a:t>The time or act of being awake and not asleep.</a:t>
             </a:r>
             <a:endParaRPr lang="en-US" sz="1200" dirty="0"/>
           </a:p>
@@ -41163,7 +41893,7 @@
                 <a:ea typeface="Trebuchet MS" pitchFamily="34" charset="-122"/>
                 <a:cs typeface="Trebuchet MS" pitchFamily="34" charset="-120"/>
               </a:rPr>
-              <a:t>awaken</a:t>
+              <a:t>wakened</a:t>
             </a:r>
             <a:endParaRPr lang="en-US" sz="1200" dirty="0"/>
           </a:p>
@@ -41229,7 +41959,7 @@
                 <a:ea typeface="Calibri" pitchFamily="34" charset="-122"/>
                 <a:cs typeface="Calibri" pitchFamily="34" charset="-120"/>
               </a:rPr>
-              <a:t>To cause someone to stop sleeping or to become alert.</a:t>
+              <a:t>To cause someone to stop sleeping or to become aware of something.</a:t>
             </a:r>
             <a:endParaRPr lang="en-US" sz="1200" dirty="0"/>
           </a:p>
@@ -41724,7 +42454,7 @@
                 <a:ea typeface="Calibri" pitchFamily="34" charset="-122"/>
                 <a:cs typeface="Calibri" pitchFamily="34" charset="-120"/>
               </a:rPr>
-              <a:t>The loud thunderstorm was enough to awaken even the deepest sleeper in the house.</a:t>
+              <a:t>The sound of the alarm was enough to awaken the whole household before sunrise.</a:t>
             </a:r>
             <a:endParaRPr lang="en-US" sz="1500" dirty="0"/>
           </a:p>
@@ -41888,7 +42618,7 @@
                 <a:ea typeface="Calibri" pitchFamily="34" charset="-122"/>
                 <a:cs typeface="Calibri" pitchFamily="34" charset="-120"/>
               </a:rPr>
-              <a:t>She spent a wakeful night worrying about her school presentation the next morning.</a:t>
+              <a:t>She spent a wakeful night worrying about her big spelling test the next morning.</a:t>
             </a:r>
             <a:endParaRPr lang="en-US" sz="1500" dirty="0"/>
           </a:p>
@@ -42052,7 +42782,7 @@
                 <a:ea typeface="Calibri" pitchFamily="34" charset="-122"/>
                 <a:cs typeface="Calibri" pitchFamily="34" charset="-120"/>
               </a:rPr>
-              <a:t>The baby would waken at least twice each night and cry until someone came to comfort her.</a:t>
+              <a:t>During his waking hours, Tom loved to read books about animals and nature.</a:t>
             </a:r>
             <a:endParaRPr lang="en-US" sz="1500" dirty="0"/>
           </a:p>
